--- a/slide/Slide_TOAN10_STEM_Bai4_T12-14.pptx
+++ b/slide/Slide_TOAN10_STEM_Bai4_T12-14.pptx
@@ -3424,7 +3424,7 @@
         <p:spPr>
           <a:xfrm>
             <a:off x="731520" y="274320"/>
-            <a:ext cx="10972800" cy="868680"/>
+            <a:ext cx="9848088" cy="868680"/>
           </a:xfrm>
           <a:prstGeom prst="rect">
             <a:avLst/>
@@ -3605,6 +3605,59 @@
                 <a:latin typeface="Calibri"/>
               </a:rPr>
               <a:t>Gợi mở: Tính chi phí tại mọi đỉnh</a:t>
+            </a:r>
+          </a:p>
+        </p:txBody>
+      </p:sp>
+      <p:sp>
+        <p:nvSpPr>
+          <p:cNvPr id="7" name="Rounded Rectangle 6"/>
+          <p:cNvSpPr/>
+          <p:nvPr/>
+        </p:nvSpPr>
+        <p:spPr>
+          <a:xfrm>
+            <a:off x="10701223" y="457200"/>
+            <a:ext cx="941832" cy="457200"/>
+          </a:xfrm>
+          <a:prstGeom prst="roundRect">
+            <a:avLst/>
+          </a:prstGeom>
+          <a:solidFill>
+            <a:srgbClr val="1E40AF"/>
+          </a:solidFill>
+          <a:ln>
+            <a:noFill/>
+          </a:ln>
+          <a:effectLst/>
+        </p:spPr>
+        <p:style>
+          <a:lnRef idx="1">
+            <a:schemeClr val="accent1"/>
+          </a:lnRef>
+          <a:fillRef idx="3">
+            <a:schemeClr val="accent1"/>
+          </a:fillRef>
+          <a:effectRef idx="2">
+            <a:schemeClr val="accent1"/>
+          </a:effectRef>
+          <a:fontRef idx="minor">
+            <a:schemeClr val="lt1"/>
+          </a:fontRef>
+        </p:style>
+        <p:txBody>
+          <a:bodyPr rtlCol="0" anchor="ctr" tIns="0" bIns="0"/>
+          <a:lstStyle/>
+          <a:p>
+            <a:pPr algn="ctr"/>
+            <a:r>
+              <a:rPr sz="1400" b="1">
+                <a:solidFill>
+                  <a:srgbClr val="FFFFFF"/>
+                </a:solidFill>
+                <a:latin typeface="Arial"/>
+              </a:rPr>
+              <a:t>ĐỀ BÀI</a:t>
             </a:r>
           </a:p>
         </p:txBody>
@@ -3688,7 +3741,7 @@
         <p:spPr>
           <a:xfrm>
             <a:off x="731520" y="274320"/>
-            <a:ext cx="10972800" cy="868680"/>
+            <a:ext cx="9610344" cy="868680"/>
           </a:xfrm>
           <a:prstGeom prst="rect">
             <a:avLst/>
@@ -3708,7 +3761,7 @@
                 </a:solidFill>
                 <a:latin typeface="Arial"/>
               </a:rPr>
-              <a:t>CHẾ TẠO VÀ THỬ NGHIỆM</a:t>
+              <a:t>TRẠM KIỂM CHỨNG AI</a:t>
             </a:r>
           </a:p>
         </p:txBody>
@@ -3787,7 +3840,7 @@
                 </a:solidFill>
                 <a:latin typeface="Calibri"/>
               </a:rPr>
-              <a:t>Toán 10 · Bài 4. Hệ bất phương trình bậc nhất hai ẩn (STEM)          12</a:t>
+              <a:t>Toán 10 · Bài 4. Hệ bất phương trình bậc nhất hai ẩn (STEM)          11</a:t>
             </a:r>
           </a:p>
         </p:txBody>
@@ -3801,7 +3854,7 @@
         <p:spPr>
           <a:xfrm>
             <a:off x="731520" y="1508760"/>
-            <a:ext cx="10789920" cy="2834640"/>
+            <a:ext cx="10789920" cy="1700784"/>
           </a:xfrm>
           <a:prstGeom prst="rect">
             <a:avLst/>
@@ -3813,6 +3866,22 @@
             <a:spAutoFit/>
           </a:bodyPr>
           <a:lstStyle/>
+          <a:p>
+            <a:pPr algn="l">
+              <a:spcAft>
+                <a:spcPts val="1000"/>
+              </a:spcAft>
+            </a:pPr>
+            <a:r>
+              <a:rPr sz="2400" b="1">
+                <a:solidFill>
+                  <a:srgbClr val="1E40AF"/>
+                </a:solidFill>
+                <a:latin typeface="Calibri"/>
+              </a:rPr>
+              <a:t>AI: 100 g thịt + 200 g đậu phụ rẻ nhất</a:t>
+            </a:r>
+          </a:p>
           <a:p>
             <a:pPr algn="l" marL="365760" indent="-365760">
               <a:spcAft>
@@ -3831,7 +3900,7 @@
                 </a:solidFill>
                 <a:latin typeface="Calibri"/>
               </a:rPr>
-              <a:t>Phiếu 4: bản thiết kế suất ăn</a:t>
+              <a:t>(1; 2) thuộc miền nghiệm (đỉnh B)</a:t>
             </a:r>
           </a:p>
           <a:p>
@@ -3852,70 +3921,147 @@
                 </a:solidFill>
                 <a:latin typeface="Calibri"/>
               </a:rPr>
-              <a:t>Mua nguyên liệu, giữ hóa đơn</a:t>
-            </a:r>
-          </a:p>
-          <a:p>
-            <a:pPr algn="l" marL="365760" indent="-365760">
+              <a:t>Chi phí 21 nghìn &gt; 13,5 nghìn</a:t>
+            </a:r>
+          </a:p>
+        </p:txBody>
+      </p:sp>
+      <p:sp>
+        <p:nvSpPr>
+          <p:cNvPr id="7" name="Rounded Rectangle 6"/>
+          <p:cNvSpPr/>
+          <p:nvPr/>
+        </p:nvSpPr>
+        <p:spPr>
+          <a:xfrm>
+            <a:off x="731520" y="3346704"/>
+            <a:ext cx="8686800" cy="685800"/>
+          </a:xfrm>
+          <a:prstGeom prst="roundRect">
+            <a:avLst>
+              <a:gd name="adj" fmla="val 8000"/>
+            </a:avLst>
+          </a:prstGeom>
+          <a:solidFill>
+            <a:srgbClr val="FEF2F2"/>
+          </a:solidFill>
+          <a:ln w="19050">
+            <a:solidFill>
+              <a:srgbClr val="991B1B"/>
+            </a:solidFill>
+          </a:ln>
+          <a:effectLst/>
+        </p:spPr>
+        <p:style>
+          <a:lnRef idx="1">
+            <a:schemeClr val="accent1"/>
+          </a:lnRef>
+          <a:fillRef idx="3">
+            <a:schemeClr val="accent1"/>
+          </a:fillRef>
+          <a:effectRef idx="2">
+            <a:schemeClr val="accent1"/>
+          </a:effectRef>
+          <a:fontRef idx="minor">
+            <a:schemeClr val="lt1"/>
+          </a:fontRef>
+        </p:style>
+        <p:txBody>
+          <a:bodyPr rtlCol="0" anchor="ctr"/>
+          <a:lstStyle/>
+          <a:p>
+            <a:pPr algn="ctr"/>
+          </a:p>
+        </p:txBody>
+      </p:sp>
+      <p:sp>
+        <p:nvSpPr>
+          <p:cNvPr id="8" name="TextBox 7"/>
+          <p:cNvSpPr txBox="1"/>
+          <p:nvPr/>
+        </p:nvSpPr>
+        <p:spPr>
+          <a:xfrm>
+            <a:off x="914400" y="3346704"/>
+            <a:ext cx="8321040" cy="685800"/>
+          </a:xfrm>
+          <a:prstGeom prst="rect">
+            <a:avLst/>
+          </a:prstGeom>
+          <a:noFill/>
+        </p:spPr>
+        <p:txBody>
+          <a:bodyPr wrap="square" anchor="ctr">
+            <a:spAutoFit/>
+          </a:bodyPr>
+          <a:lstStyle/>
+          <a:p>
+            <a:pPr algn="l">
               <a:spcAft>
-                <a:spcPts val="1000"/>
+                <a:spcPts val="400"/>
               </a:spcAft>
-              <a:buClr>
-                <a:srgbClr val="1E40AF"/>
-              </a:buClr>
-              <a:buFont typeface="Arial"/>
-              <a:buChar char="•"/>
             </a:pPr>
             <a:r>
-              <a:rPr sz="2400">
-                <a:solidFill>
-                  <a:srgbClr val="1E293B"/>
+              <a:rPr sz="2400" b="1">
+                <a:solidFill>
+                  <a:srgbClr val="991B1B"/>
                 </a:solidFill>
                 <a:latin typeface="Calibri"/>
               </a:rPr>
-              <a:t>Cân, chế biến, chụp ảnh, quay video</a:t>
-            </a:r>
-          </a:p>
-          <a:p>
-            <a:pPr algn="l" marL="365760" indent="-365760">
-              <a:spcAft>
-                <a:spcPts val="1000"/>
-              </a:spcAft>
-              <a:buClr>
-                <a:srgbClr val="1E40AF"/>
-              </a:buClr>
-              <a:buFont typeface="Arial"/>
-              <a:buChar char="•"/>
-            </a:pPr>
-            <a:r>
-              <a:rPr sz="2400">
-                <a:solidFill>
-                  <a:srgbClr val="1E293B"/>
-                </a:solidFill>
-                <a:latin typeface="Calibri"/>
+              <a:t>AI không xét đủ các đỉnh</a:t>
+            </a:r>
+          </a:p>
+        </p:txBody>
+      </p:sp>
+      <p:sp>
+        <p:nvSpPr>
+          <p:cNvPr id="9" name="Rounded Rectangle 8"/>
+          <p:cNvSpPr/>
+          <p:nvPr/>
+        </p:nvSpPr>
+        <p:spPr>
+          <a:xfrm>
+            <a:off x="10463479" y="457200"/>
+            <a:ext cx="1179576" cy="457200"/>
+          </a:xfrm>
+          <a:prstGeom prst="roundRect">
+            <a:avLst/>
+          </a:prstGeom>
+          <a:solidFill>
+            <a:srgbClr val="166534"/>
+          </a:solidFill>
+          <a:ln>
+            <a:noFill/>
+          </a:ln>
+          <a:effectLst/>
+        </p:spPr>
+        <p:style>
+          <a:lnRef idx="1">
+            <a:schemeClr val="accent1"/>
+          </a:lnRef>
+          <a:fillRef idx="3">
+            <a:schemeClr val="accent1"/>
+          </a:fillRef>
+          <a:effectRef idx="2">
+            <a:schemeClr val="accent1"/>
+          </a:effectRef>
+          <a:fontRef idx="minor">
+            <a:schemeClr val="lt1"/>
+          </a:fontRef>
+        </p:style>
+        <p:txBody>
+          <a:bodyPr rtlCol="0" anchor="ctr" tIns="0" bIns="0"/>
+          <a:lstStyle/>
+          <a:p>
+            <a:pPr algn="ctr"/>
+            <a:r>
+              <a:rPr sz="1400" b="1">
+                <a:solidFill>
+                  <a:srgbClr val="FFFFFF"/>
+                </a:solidFill>
+                <a:latin typeface="Arial"/>
               </a:rPr>
-              <a:t>Sai lệch khối lượng không quá 10%</a:t>
-            </a:r>
-          </a:p>
-          <a:p>
-            <a:pPr algn="l" marL="365760" indent="-365760">
-              <a:spcAft>
-                <a:spcPts val="1000"/>
-              </a:spcAft>
-              <a:buClr>
-                <a:srgbClr val="1E40AF"/>
-              </a:buClr>
-              <a:buFont typeface="Arial"/>
-              <a:buChar char="•"/>
-            </a:pPr>
-            <a:r>
-              <a:rPr sz="2400">
-                <a:solidFill>
-                  <a:srgbClr val="1E293B"/>
-                </a:solidFill>
-                <a:latin typeface="Calibri"/>
-              </a:rPr>
-              <a:t>Làm poster và 3–5 slide báo cáo</a:t>
+              <a:t>LỜI GIẢI</a:t>
             </a:r>
           </a:p>
         </p:txBody>
@@ -4000,6 +4146,317 @@
           <a:xfrm>
             <a:off x="731520" y="274320"/>
             <a:ext cx="10972800" cy="868680"/>
+          </a:xfrm>
+          <a:prstGeom prst="rect">
+            <a:avLst/>
+          </a:prstGeom>
+          <a:noFill/>
+        </p:spPr>
+        <p:txBody>
+          <a:bodyPr wrap="none" anchor="ctr">
+            <a:spAutoFit/>
+          </a:bodyPr>
+          <a:lstStyle/>
+          <a:p>
+            <a:r>
+              <a:rPr sz="3600" b="1">
+                <a:solidFill>
+                  <a:srgbClr val="1E40AF"/>
+                </a:solidFill>
+                <a:latin typeface="Arial"/>
+              </a:rPr>
+              <a:t>CHẾ TẠO VÀ THỬ NGHIỆM</a:t>
+            </a:r>
+          </a:p>
+        </p:txBody>
+      </p:sp>
+      <p:sp>
+        <p:nvSpPr>
+          <p:cNvPr id="4" name="Rectangle 3"/>
+          <p:cNvSpPr/>
+          <p:nvPr/>
+        </p:nvSpPr>
+        <p:spPr>
+          <a:xfrm>
+            <a:off x="457200" y="1207008"/>
+            <a:ext cx="11274552" cy="22000"/>
+          </a:xfrm>
+          <a:prstGeom prst="rect">
+            <a:avLst/>
+          </a:prstGeom>
+          <a:solidFill>
+            <a:srgbClr val="E2E8F0"/>
+          </a:solidFill>
+          <a:ln>
+            <a:noFill/>
+          </a:ln>
+          <a:effectLst/>
+        </p:spPr>
+        <p:style>
+          <a:lnRef idx="1">
+            <a:schemeClr val="accent1"/>
+          </a:lnRef>
+          <a:fillRef idx="3">
+            <a:schemeClr val="accent1"/>
+          </a:fillRef>
+          <a:effectRef idx="2">
+            <a:schemeClr val="accent1"/>
+          </a:effectRef>
+          <a:fontRef idx="minor">
+            <a:schemeClr val="lt1"/>
+          </a:fontRef>
+        </p:style>
+        <p:txBody>
+          <a:bodyPr rtlCol="0" anchor="ctr"/>
+          <a:lstStyle/>
+          <a:p>
+            <a:pPr algn="ctr"/>
+          </a:p>
+        </p:txBody>
+      </p:sp>
+      <p:sp>
+        <p:nvSpPr>
+          <p:cNvPr id="5" name="TextBox 4"/>
+          <p:cNvSpPr txBox="1"/>
+          <p:nvPr/>
+        </p:nvSpPr>
+        <p:spPr>
+          <a:xfrm>
+            <a:off x="457200" y="6355080"/>
+            <a:ext cx="11274552" cy="365760"/>
+          </a:xfrm>
+          <a:prstGeom prst="rect">
+            <a:avLst/>
+          </a:prstGeom>
+          <a:noFill/>
+        </p:spPr>
+        <p:txBody>
+          <a:bodyPr wrap="none">
+            <a:spAutoFit/>
+          </a:bodyPr>
+          <a:lstStyle/>
+          <a:p>
+            <a:pPr algn="r"/>
+            <a:r>
+              <a:rPr sz="1200">
+                <a:solidFill>
+                  <a:srgbClr val="64748B"/>
+                </a:solidFill>
+                <a:latin typeface="Calibri"/>
+              </a:rPr>
+              <a:t>Toán 10 · Bài 4. Hệ bất phương trình bậc nhất hai ẩn (STEM)          12</a:t>
+            </a:r>
+          </a:p>
+        </p:txBody>
+      </p:sp>
+      <p:sp>
+        <p:nvSpPr>
+          <p:cNvPr id="6" name="TextBox 5"/>
+          <p:cNvSpPr txBox="1"/>
+          <p:nvPr/>
+        </p:nvSpPr>
+        <p:spPr>
+          <a:xfrm>
+            <a:off x="731520" y="1508760"/>
+            <a:ext cx="10789920" cy="2834640"/>
+          </a:xfrm>
+          <a:prstGeom prst="rect">
+            <a:avLst/>
+          </a:prstGeom>
+          <a:noFill/>
+        </p:spPr>
+        <p:txBody>
+          <a:bodyPr wrap="square" anchor="t">
+            <a:spAutoFit/>
+          </a:bodyPr>
+          <a:lstStyle/>
+          <a:p>
+            <a:pPr algn="l" marL="365760" indent="-365760">
+              <a:spcAft>
+                <a:spcPts val="1000"/>
+              </a:spcAft>
+              <a:buClr>
+                <a:srgbClr val="1E40AF"/>
+              </a:buClr>
+              <a:buFont typeface="Arial"/>
+              <a:buChar char="•"/>
+            </a:pPr>
+            <a:r>
+              <a:rPr sz="2400">
+                <a:solidFill>
+                  <a:srgbClr val="1E293B"/>
+                </a:solidFill>
+                <a:latin typeface="Calibri"/>
+              </a:rPr>
+              <a:t>Phiếu 4: bản thiết kế suất ăn</a:t>
+            </a:r>
+          </a:p>
+          <a:p>
+            <a:pPr algn="l" marL="365760" indent="-365760">
+              <a:spcAft>
+                <a:spcPts val="1000"/>
+              </a:spcAft>
+              <a:buClr>
+                <a:srgbClr val="1E40AF"/>
+              </a:buClr>
+              <a:buFont typeface="Arial"/>
+              <a:buChar char="•"/>
+            </a:pPr>
+            <a:r>
+              <a:rPr sz="2400">
+                <a:solidFill>
+                  <a:srgbClr val="1E293B"/>
+                </a:solidFill>
+                <a:latin typeface="Calibri"/>
+              </a:rPr>
+              <a:t>Mua nguyên liệu, giữ hóa đơn</a:t>
+            </a:r>
+          </a:p>
+          <a:p>
+            <a:pPr algn="l" marL="365760" indent="-365760">
+              <a:spcAft>
+                <a:spcPts val="1000"/>
+              </a:spcAft>
+              <a:buClr>
+                <a:srgbClr val="1E40AF"/>
+              </a:buClr>
+              <a:buFont typeface="Arial"/>
+              <a:buChar char="•"/>
+            </a:pPr>
+            <a:r>
+              <a:rPr sz="2400">
+                <a:solidFill>
+                  <a:srgbClr val="1E293B"/>
+                </a:solidFill>
+                <a:latin typeface="Calibri"/>
+              </a:rPr>
+              <a:t>Cân, chế biến, chụp ảnh, quay video</a:t>
+            </a:r>
+          </a:p>
+          <a:p>
+            <a:pPr algn="l" marL="365760" indent="-365760">
+              <a:spcAft>
+                <a:spcPts val="1000"/>
+              </a:spcAft>
+              <a:buClr>
+                <a:srgbClr val="1E40AF"/>
+              </a:buClr>
+              <a:buFont typeface="Arial"/>
+              <a:buChar char="•"/>
+            </a:pPr>
+            <a:r>
+              <a:rPr sz="2400">
+                <a:solidFill>
+                  <a:srgbClr val="1E293B"/>
+                </a:solidFill>
+                <a:latin typeface="Calibri"/>
+              </a:rPr>
+              <a:t>Sai lệch khối lượng không quá 10%</a:t>
+            </a:r>
+          </a:p>
+          <a:p>
+            <a:pPr algn="l" marL="365760" indent="-365760">
+              <a:spcAft>
+                <a:spcPts val="1000"/>
+              </a:spcAft>
+              <a:buClr>
+                <a:srgbClr val="1E40AF"/>
+              </a:buClr>
+              <a:buFont typeface="Arial"/>
+              <a:buChar char="•"/>
+            </a:pPr>
+            <a:r>
+              <a:rPr sz="2400">
+                <a:solidFill>
+                  <a:srgbClr val="1E293B"/>
+                </a:solidFill>
+                <a:latin typeface="Calibri"/>
+              </a:rPr>
+              <a:t>Làm poster và 3–5 slide báo cáo</a:t>
+            </a:r>
+          </a:p>
+        </p:txBody>
+      </p:sp>
+    </p:spTree>
+  </p:cSld>
+  <p:clrMapOvr>
+    <a:masterClrMapping/>
+  </p:clrMapOvr>
+</p:sld>
+</file>
+
+<file path=ppt/slides/slide13.xml><?xml version="1.0" encoding="utf-8"?>
+<p:sld xmlns:a="http://schemas.openxmlformats.org/drawingml/2006/main" xmlns:p="http://schemas.openxmlformats.org/presentationml/2006/main" xmlns:r="http://schemas.openxmlformats.org/officeDocument/2006/relationships">
+  <p:cSld>
+    <p:bg>
+      <p:bgPr>
+        <a:solidFill>
+          <a:srgbClr val="FFFFFF"/>
+        </a:solidFill>
+        <a:effectLst/>
+      </p:bgPr>
+    </p:bg>
+    <p:spTree>
+      <p:nvGrpSpPr>
+        <p:cNvPr id="1" name=""/>
+        <p:cNvGrpSpPr/>
+        <p:nvPr/>
+      </p:nvGrpSpPr>
+      <p:grpSpPr/>
+      <p:sp>
+        <p:nvSpPr>
+          <p:cNvPr id="2" name="Rectangle 1"/>
+          <p:cNvSpPr/>
+          <p:nvPr/>
+        </p:nvSpPr>
+        <p:spPr>
+          <a:xfrm>
+            <a:off x="457200" y="384048"/>
+            <a:ext cx="109728" cy="658368"/>
+          </a:xfrm>
+          <a:prstGeom prst="rect">
+            <a:avLst/>
+          </a:prstGeom>
+          <a:solidFill>
+            <a:srgbClr val="1E40AF"/>
+          </a:solidFill>
+          <a:ln>
+            <a:noFill/>
+          </a:ln>
+          <a:effectLst/>
+        </p:spPr>
+        <p:style>
+          <a:lnRef idx="1">
+            <a:schemeClr val="accent1"/>
+          </a:lnRef>
+          <a:fillRef idx="3">
+            <a:schemeClr val="accent1"/>
+          </a:fillRef>
+          <a:effectRef idx="2">
+            <a:schemeClr val="accent1"/>
+          </a:effectRef>
+          <a:fontRef idx="minor">
+            <a:schemeClr val="lt1"/>
+          </a:fontRef>
+        </p:style>
+        <p:txBody>
+          <a:bodyPr rtlCol="0" anchor="ctr"/>
+          <a:lstStyle/>
+          <a:p>
+            <a:pPr algn="ctr"/>
+          </a:p>
+        </p:txBody>
+      </p:sp>
+      <p:sp>
+        <p:nvSpPr>
+          <p:cNvPr id="3" name="TextBox 2"/>
+          <p:cNvSpPr txBox="1"/>
+          <p:nvPr/>
+        </p:nvSpPr>
+        <p:spPr>
+          <a:xfrm>
+            <a:off x="731520" y="274320"/>
+            <a:ext cx="9848088" cy="868680"/>
           </a:xfrm>
           <a:prstGeom prst="rect">
             <a:avLst/>
@@ -4666,44 +5123,18 @@
           </a:p>
         </p:txBody>
       </p:sp>
-    </p:spTree>
-  </p:cSld>
-  <p:clrMapOvr>
-    <a:masterClrMapping/>
-  </p:clrMapOvr>
-</p:sld>
-</file>
-
-<file path=ppt/slides/slide13.xml><?xml version="1.0" encoding="utf-8"?>
-<p:sld xmlns:a="http://schemas.openxmlformats.org/drawingml/2006/main" xmlns:p="http://schemas.openxmlformats.org/presentationml/2006/main" xmlns:r="http://schemas.openxmlformats.org/officeDocument/2006/relationships">
-  <p:cSld>
-    <p:bg>
-      <p:bgPr>
-        <a:solidFill>
-          <a:srgbClr val="FFFFFF"/>
-        </a:solidFill>
-        <a:effectLst/>
-      </p:bgPr>
-    </p:bg>
-    <p:spTree>
-      <p:nvGrpSpPr>
-        <p:cNvPr id="1" name=""/>
-        <p:cNvGrpSpPr/>
-        <p:nvPr/>
-      </p:nvGrpSpPr>
-      <p:grpSpPr/>
-      <p:sp>
-        <p:nvSpPr>
-          <p:cNvPr id="2" name="Rectangle 1"/>
+      <p:sp>
+        <p:nvSpPr>
+          <p:cNvPr id="9" name="Rounded Rectangle 8"/>
           <p:cNvSpPr/>
           <p:nvPr/>
         </p:nvSpPr>
         <p:spPr>
           <a:xfrm>
-            <a:off x="457200" y="384048"/>
-            <a:ext cx="109728" cy="658368"/>
-          </a:xfrm>
-          <a:prstGeom prst="rect">
+            <a:off x="10701223" y="457200"/>
+            <a:ext cx="941832" cy="457200"/>
+          </a:xfrm>
+          <a:prstGeom prst="roundRect">
             <a:avLst/>
           </a:prstGeom>
           <a:solidFill>
@@ -4729,341 +5160,22 @@
           </a:fontRef>
         </p:style>
         <p:txBody>
-          <a:bodyPr rtlCol="0" anchor="ctr"/>
+          <a:bodyPr rtlCol="0" anchor="ctr" tIns="0" bIns="0"/>
           <a:lstStyle/>
           <a:p>
             <a:pPr algn="ctr"/>
-          </a:p>
-        </p:txBody>
-      </p:sp>
-      <p:sp>
-        <p:nvSpPr>
-          <p:cNvPr id="3" name="TextBox 2"/>
-          <p:cNvSpPr txBox="1"/>
-          <p:nvPr/>
-        </p:nvSpPr>
-        <p:spPr>
-          <a:xfrm>
-            <a:off x="731520" y="274320"/>
-            <a:ext cx="10972800" cy="868680"/>
-          </a:xfrm>
-          <a:prstGeom prst="rect">
-            <a:avLst/>
-          </a:prstGeom>
-          <a:noFill/>
-        </p:spPr>
-        <p:txBody>
-          <a:bodyPr wrap="none" anchor="ctr">
-            <a:spAutoFit/>
-          </a:bodyPr>
-          <a:lstStyle/>
-          <a:p>
-            <a:r>
-              <a:rPr sz="3600" b="1">
-                <a:solidFill>
-                  <a:srgbClr val="1E40AF"/>
+            <a:r>
+              <a:rPr sz="1400" b="1">
+                <a:solidFill>
+                  <a:srgbClr val="FFFFFF"/>
                 </a:solidFill>
                 <a:latin typeface="Arial"/>
               </a:rPr>
-              <a:t>LUYỆN TẬP 2.4 – 2.5</a:t>
-            </a:r>
-          </a:p>
-        </p:txBody>
-      </p:sp>
-      <p:sp>
-        <p:nvSpPr>
-          <p:cNvPr id="4" name="Rectangle 3"/>
-          <p:cNvSpPr/>
-          <p:nvPr/>
-        </p:nvSpPr>
-        <p:spPr>
-          <a:xfrm>
-            <a:off x="457200" y="1207008"/>
-            <a:ext cx="11274552" cy="22000"/>
-          </a:xfrm>
-          <a:prstGeom prst="rect">
-            <a:avLst/>
-          </a:prstGeom>
-          <a:solidFill>
-            <a:srgbClr val="E2E8F0"/>
-          </a:solidFill>
-          <a:ln>
-            <a:noFill/>
-          </a:ln>
-          <a:effectLst/>
-        </p:spPr>
-        <p:style>
-          <a:lnRef idx="1">
-            <a:schemeClr val="accent1"/>
-          </a:lnRef>
-          <a:fillRef idx="3">
-            <a:schemeClr val="accent1"/>
-          </a:fillRef>
-          <a:effectRef idx="2">
-            <a:schemeClr val="accent1"/>
-          </a:effectRef>
-          <a:fontRef idx="minor">
-            <a:schemeClr val="lt1"/>
-          </a:fontRef>
-        </p:style>
-        <p:txBody>
-          <a:bodyPr rtlCol="0" anchor="ctr"/>
-          <a:lstStyle/>
-          <a:p>
-            <a:pPr algn="ctr"/>
-          </a:p>
-        </p:txBody>
-      </p:sp>
-      <p:sp>
-        <p:nvSpPr>
-          <p:cNvPr id="5" name="TextBox 4"/>
-          <p:cNvSpPr txBox="1"/>
-          <p:nvPr/>
-        </p:nvSpPr>
-        <p:spPr>
-          <a:xfrm>
-            <a:off x="457200" y="6355080"/>
-            <a:ext cx="11274552" cy="365760"/>
-          </a:xfrm>
-          <a:prstGeom prst="rect">
-            <a:avLst/>
-          </a:prstGeom>
-          <a:noFill/>
-        </p:spPr>
-        <p:txBody>
-          <a:bodyPr wrap="none">
-            <a:spAutoFit/>
-          </a:bodyPr>
-          <a:lstStyle/>
-          <a:p>
-            <a:pPr algn="r"/>
-            <a:r>
-              <a:rPr sz="1200">
-                <a:solidFill>
-                  <a:srgbClr val="64748B"/>
-                </a:solidFill>
-                <a:latin typeface="Calibri"/>
-              </a:rPr>
-              <a:t>Toán 10 · Bài 4. Hệ bất phương trình bậc nhất hai ẩn (STEM)          15</a:t>
-            </a:r>
-          </a:p>
-        </p:txBody>
-      </p:sp>
-      <mc:AlternateContent xmlns:mc="http://schemas.openxmlformats.org/markup-compatibility/2006">
-        <mc:Choice xmlns:a14="http://schemas.microsoft.com/office/drawing/2010/main" Requires="a14">
-          <p:sp>
-            <p:nvSpPr>
-              <p:cNvPr id="6" name="TextBox 5"/>
-              <p:cNvSpPr txBox="1"/>
-              <p:nvPr/>
-            </p:nvSpPr>
-            <p:spPr>
-              <a:xfrm>
-                <a:off x="731520" y="1508760"/>
-                <a:ext cx="10789920" cy="2039112"/>
-              </a:xfrm>
-              <a:prstGeom prst="rect">
-                <a:avLst/>
-              </a:prstGeom>
-              <a:noFill/>
-            </p:spPr>
-            <p:txBody>
-              <a:bodyPr wrap="square" anchor="t">
-                <a:spAutoFit/>
-              </a:bodyPr>
-              <a:lstStyle/>
-              <a:p>
-                <a:pPr algn="l" marL="365760" indent="-365760">
-                  <a:spcAft>
-                    <a:spcPts val="1000"/>
-                  </a:spcAft>
-                  <a:buClr>
-                    <a:srgbClr val="1E40AF"/>
-                  </a:buClr>
-                  <a:buFont typeface="Arial"/>
-                  <a:buChar char="•"/>
-                </a:pPr>
-                <a:r>
-                  <a:rPr sz="2400">
-                    <a:solidFill>
-                      <a:srgbClr val="1E293B"/>
-                    </a:solidFill>
-                    <a:latin typeface="Calibri"/>
-                  </a:rPr>
-                  <a:t>2.4. Hệ nào là hệ bậc nhất hai ẩn?</a:t>
-                </a:r>
-              </a:p>
-              <a:p>
-                <a:pPr algn="l" marL="365760" indent="-365760">
-                  <a:spcAft>
-                    <a:spcPts val="1000"/>
-                  </a:spcAft>
-                  <a:buClr>
-                    <a:srgbClr val="1E40AF"/>
-                  </a:buClr>
-                  <a:buFont typeface="Arial"/>
-                  <a:buChar char="•"/>
-                </a:pPr>
-                <a:r>
-                  <a:rPr sz="2400">
-                    <a:solidFill>
-                      <a:srgbClr val="1E293B"/>
-                    </a:solidFill>
-                    <a:latin typeface="Calibri"/>
-                  </a:rPr>
-                  <a:t>2.5b) Miền nghiệm: </a:t>
-                </a:r>
-                <a14:m>
-                  <m:oMath xmlns:m="http://schemas.openxmlformats.org/officeDocument/2006/math">
-                    <m:d>
-                      <m:dPr>
-                        <m:begChr m:val="{"/>
-                        <m:sepChr m:val=""/>
-                        <m:endChr m:val=""/>
-                      </m:dPr>
-                      <m:e>
-                        <m:eqArr>
-                          <m:e>
-                            <m:r>
-                              <a:rPr lang="vi-VN" sz="2400" b="0">
-                                <a:solidFill>
-                                  <a:srgbClr val="1E293B"/>
-                                </a:solidFill>
-                                <a:latin typeface="Cambria Math" panose="02040503050406030204" pitchFamily="18" charset="0"/>
-                              </a:rPr>
-                              <m:t>&amp;</m:t>
-                            </m:r>
-                            <m:r>
-                              <a:rPr lang="vi-VN" sz="2400" b="0">
-                                <a:solidFill>
-                                  <a:srgbClr val="1E293B"/>
-                                </a:solidFill>
-                                <a:latin typeface="Cambria Math" panose="02040503050406030204" pitchFamily="18" charset="0"/>
-                              </a:rPr>
-                              <m:t>x≥0</m:t>
-                            </m:r>
-                          </m:e>
-                          <m:e>
-                            <m:r>
-                              <a:rPr lang="vi-VN" sz="2400" b="0">
-                                <a:solidFill>
-                                  <a:srgbClr val="1E293B"/>
-                                </a:solidFill>
-                                <a:latin typeface="Cambria Math" panose="02040503050406030204" pitchFamily="18" charset="0"/>
-                              </a:rPr>
-                              <m:t>&amp;</m:t>
-                            </m:r>
-                            <m:r>
-                              <a:rPr lang="vi-VN" sz="2400" b="0">
-                                <a:solidFill>
-                                  <a:srgbClr val="1E293B"/>
-                                </a:solidFill>
-                                <a:latin typeface="Cambria Math" panose="02040503050406030204" pitchFamily="18" charset="0"/>
-                              </a:rPr>
-                              <m:t>y≥0</m:t>
-                            </m:r>
-                          </m:e>
-                          <m:e>
-                            <m:r>
-                              <a:rPr lang="vi-VN" sz="2400" b="0">
-                                <a:solidFill>
-                                  <a:srgbClr val="1E293B"/>
-                                </a:solidFill>
-                                <a:latin typeface="Cambria Math" panose="02040503050406030204" pitchFamily="18" charset="0"/>
-                              </a:rPr>
-                              <m:t>&amp;</m:t>
-                            </m:r>
-                            <m:r>
-                              <a:rPr lang="vi-VN" sz="2400" b="0">
-                                <a:solidFill>
-                                  <a:srgbClr val="1E293B"/>
-                                </a:solidFill>
-                                <a:latin typeface="Cambria Math" panose="02040503050406030204" pitchFamily="18" charset="0"/>
-                              </a:rPr>
-                              <m:t>2x+y≤4</m:t>
-                            </m:r>
-                          </m:e>
-                        </m:eqArr>
-                      </m:e>
-                    </m:d>
-                  </m:oMath>
-                </a14:m>
-              </a:p>
-            </p:txBody>
-          </p:sp>
-        </mc:Choice>
-        <mc:Fallback>
-          <p:sp>
-            <p:nvSpPr>
-              <p:cNvPr id="6" name="TextBox 5"/>
-              <p:cNvSpPr txBox="1"/>
-              <p:nvPr/>
-            </p:nvSpPr>
-            <p:spPr>
-              <a:xfrm>
-                <a:off x="731520" y="1508760"/>
-                <a:ext cx="10789920" cy="2039112"/>
-              </a:xfrm>
-              <a:prstGeom prst="rect">
-                <a:avLst/>
-              </a:prstGeom>
-              <a:noFill/>
-            </p:spPr>
-            <p:txBody>
-              <a:bodyPr wrap="square" anchor="t">
-                <a:spAutoFit/>
-              </a:bodyPr>
-              <a:lstStyle/>
-              <a:p>
-                <a:pPr algn="l" marL="365760" indent="-365760">
-                  <a:spcAft>
-                    <a:spcPts val="1000"/>
-                  </a:spcAft>
-                  <a:buClr>
-                    <a:srgbClr val="1E40AF"/>
-                  </a:buClr>
-                  <a:buFont typeface="Arial"/>
-                  <a:buChar char="•"/>
-                </a:pPr>
-                <a:r>
-                  <a:rPr sz="2400">
-                    <a:solidFill>
-                      <a:srgbClr val="1E293B"/>
-                    </a:solidFill>
-                    <a:latin typeface="Calibri"/>
-                  </a:rPr>
-                  <a:t>2.4. Hệ nào là hệ bậc nhất hai ẩn?</a:t>
-                </a:r>
-              </a:p>
-              <a:p>
-                <a:pPr algn="l" marL="365760" indent="-365760">
-                  <a:spcAft>
-                    <a:spcPts val="1000"/>
-                  </a:spcAft>
-                  <a:buClr>
-                    <a:srgbClr val="1E40AF"/>
-                  </a:buClr>
-                  <a:buFont typeface="Arial"/>
-                  <a:buChar char="•"/>
-                </a:pPr>
-                <a:r>
-                  <a:rPr sz="2400">
-                    <a:solidFill>
-                      <a:srgbClr val="1E293B"/>
-                    </a:solidFill>
-                    <a:latin typeface="Calibri"/>
-                  </a:rPr>
-                  <a:t>2.5b) Miền nghiệm: </a:t>
-                </a:r>
-                <a:r>
-                  <a:rPr lang="vi-VN"/>
-                  <a:t>\begin{cases}x\ge 0\\y\ge 0\\2x+y\le 4\end{cases}</a:t>
-                </a:r>
-              </a:p>
-            </p:txBody>
-          </p:sp>
-        </mc:Fallback>
-      </mc:AlternateContent>
+              <a:t>ĐỀ BÀI</a:t>
+            </a:r>
+          </a:p>
+        </p:txBody>
+      </p:sp>
     </p:spTree>
   </p:cSld>
   <p:clrMapOvr>
@@ -5143,7 +5255,7 @@
         <p:spPr>
           <a:xfrm>
             <a:off x="731520" y="274320"/>
-            <a:ext cx="10972800" cy="868680"/>
+            <a:ext cx="9610344" cy="868680"/>
           </a:xfrm>
           <a:prstGeom prst="rect">
             <a:avLst/>
@@ -5163,1190 +5275,7 @@
                 </a:solidFill>
                 <a:latin typeface="Arial"/>
               </a:rPr>
-              <a:t>NHIỆM VỤ VỀ NHÀ</a:t>
-            </a:r>
-          </a:p>
-        </p:txBody>
-      </p:sp>
-      <p:sp>
-        <p:nvSpPr>
-          <p:cNvPr id="4" name="Rectangle 3"/>
-          <p:cNvSpPr/>
-          <p:nvPr/>
-        </p:nvSpPr>
-        <p:spPr>
-          <a:xfrm>
-            <a:off x="457200" y="1207008"/>
-            <a:ext cx="11274552" cy="22000"/>
-          </a:xfrm>
-          <a:prstGeom prst="rect">
-            <a:avLst/>
-          </a:prstGeom>
-          <a:solidFill>
-            <a:srgbClr val="E2E8F0"/>
-          </a:solidFill>
-          <a:ln>
-            <a:noFill/>
-          </a:ln>
-          <a:effectLst/>
-        </p:spPr>
-        <p:style>
-          <a:lnRef idx="1">
-            <a:schemeClr val="accent1"/>
-          </a:lnRef>
-          <a:fillRef idx="3">
-            <a:schemeClr val="accent1"/>
-          </a:fillRef>
-          <a:effectRef idx="2">
-            <a:schemeClr val="accent1"/>
-          </a:effectRef>
-          <a:fontRef idx="minor">
-            <a:schemeClr val="lt1"/>
-          </a:fontRef>
-        </p:style>
-        <p:txBody>
-          <a:bodyPr rtlCol="0" anchor="ctr"/>
-          <a:lstStyle/>
-          <a:p>
-            <a:pPr algn="ctr"/>
-          </a:p>
-        </p:txBody>
-      </p:sp>
-      <p:sp>
-        <p:nvSpPr>
-          <p:cNvPr id="5" name="TextBox 4"/>
-          <p:cNvSpPr txBox="1"/>
-          <p:nvPr/>
-        </p:nvSpPr>
-        <p:spPr>
-          <a:xfrm>
-            <a:off x="457200" y="6355080"/>
-            <a:ext cx="11274552" cy="365760"/>
-          </a:xfrm>
-          <a:prstGeom prst="rect">
-            <a:avLst/>
-          </a:prstGeom>
-          <a:noFill/>
-        </p:spPr>
-        <p:txBody>
-          <a:bodyPr wrap="none">
-            <a:spAutoFit/>
-          </a:bodyPr>
-          <a:lstStyle/>
-          <a:p>
-            <a:pPr algn="r"/>
-            <a:r>
-              <a:rPr sz="1200">
-                <a:solidFill>
-                  <a:srgbClr val="64748B"/>
-                </a:solidFill>
-                <a:latin typeface="Calibri"/>
-              </a:rPr>
-              <a:t>Toán 10 · Bài 4. Hệ bất phương trình bậc nhất hai ẩn (STEM)          17</a:t>
-            </a:r>
-          </a:p>
-        </p:txBody>
-      </p:sp>
-      <p:sp>
-        <p:nvSpPr>
-          <p:cNvPr id="6" name="TextBox 5"/>
-          <p:cNvSpPr txBox="1"/>
-          <p:nvPr/>
-        </p:nvSpPr>
-        <p:spPr>
-          <a:xfrm>
-            <a:off x="731520" y="1508760"/>
-            <a:ext cx="10789920" cy="2267712"/>
-          </a:xfrm>
-          <a:prstGeom prst="rect">
-            <a:avLst/>
-          </a:prstGeom>
-          <a:noFill/>
-        </p:spPr>
-        <p:txBody>
-          <a:bodyPr wrap="square" anchor="t">
-            <a:spAutoFit/>
-          </a:bodyPr>
-          <a:lstStyle/>
-          <a:p>
-            <a:pPr algn="l" marL="365760" indent="-365760">
-              <a:spcAft>
-                <a:spcPts val="1000"/>
-              </a:spcAft>
-              <a:buClr>
-                <a:srgbClr val="1E40AF"/>
-              </a:buClr>
-              <a:buFont typeface="Arial"/>
-              <a:buChar char="•"/>
-            </a:pPr>
-            <a:r>
-              <a:rPr sz="2400">
-                <a:solidFill>
-                  <a:srgbClr val="1E293B"/>
-                </a:solidFill>
-                <a:latin typeface="Calibri"/>
-              </a:rPr>
-              <a:t>Bài tập 2.6: thịt bò, thịt lợn</a:t>
-            </a:r>
-          </a:p>
-          <a:p>
-            <a:pPr algn="l" marL="365760" indent="-365760">
-              <a:spcAft>
-                <a:spcPts val="1000"/>
-              </a:spcAft>
-              <a:buClr>
-                <a:srgbClr val="1E40AF"/>
-              </a:buClr>
-              <a:buFont typeface="Arial"/>
-              <a:buChar char="•"/>
-            </a:pPr>
-            <a:r>
-              <a:rPr sz="2400">
-                <a:solidFill>
-                  <a:srgbClr val="1E293B"/>
-                </a:solidFill>
-                <a:latin typeface="Calibri"/>
-              </a:rPr>
-              <a:t>Hoàn thiện sản phẩm theo góp ý</a:t>
-            </a:r>
-          </a:p>
-          <a:p>
-            <a:pPr algn="l" marL="365760" indent="-365760">
-              <a:spcAft>
-                <a:spcPts val="1000"/>
-              </a:spcAft>
-              <a:buClr>
-                <a:srgbClr val="1E40AF"/>
-              </a:buClr>
-              <a:buFont typeface="Arial"/>
-              <a:buChar char="•"/>
-            </a:pPr>
-            <a:r>
-              <a:rPr sz="2400">
-                <a:solidFill>
-                  <a:srgbClr val="1E293B"/>
-                </a:solidFill>
-                <a:latin typeface="Calibri"/>
-              </a:rPr>
-              <a:t>Nộp bản hoàn chỉnh lên Classroom</a:t>
-            </a:r>
-          </a:p>
-          <a:p>
-            <a:pPr algn="l" marL="365760" indent="-365760">
-              <a:spcAft>
-                <a:spcPts val="1000"/>
-              </a:spcAft>
-              <a:buClr>
-                <a:srgbClr val="1E40AF"/>
-              </a:buClr>
-              <a:buFont typeface="Arial"/>
-              <a:buChar char="•"/>
-            </a:pPr>
-            <a:r>
-              <a:rPr sz="2400">
-                <a:solidFill>
-                  <a:srgbClr val="1E293B"/>
-                </a:solidFill>
-                <a:latin typeface="Calibri"/>
-              </a:rPr>
-              <a:t>Chuẩn bị: Bài tập cuối chương II</a:t>
-            </a:r>
-          </a:p>
-        </p:txBody>
-      </p:sp>
-    </p:spTree>
-  </p:cSld>
-  <p:clrMapOvr>
-    <a:masterClrMapping/>
-  </p:clrMapOvr>
-</p:sld>
-</file>
-
-<file path=ppt/slides/slide15.xml><?xml version="1.0" encoding="utf-8"?>
-<p:sld xmlns:a="http://schemas.openxmlformats.org/drawingml/2006/main" xmlns:p="http://schemas.openxmlformats.org/presentationml/2006/main" xmlns:r="http://schemas.openxmlformats.org/officeDocument/2006/relationships">
-  <p:cSld>
-    <p:bg>
-      <p:bgPr>
-        <a:solidFill>
-          <a:srgbClr val="FFFFFF"/>
-        </a:solidFill>
-        <a:effectLst/>
-      </p:bgPr>
-    </p:bg>
-    <p:spTree>
-      <p:nvGrpSpPr>
-        <p:cNvPr id="1" name=""/>
-        <p:cNvGrpSpPr/>
-        <p:nvPr/>
-      </p:nvGrpSpPr>
-      <p:grpSpPr/>
-      <p:sp>
-        <p:nvSpPr>
-          <p:cNvPr id="2" name="Rectangle 1"/>
-          <p:cNvSpPr/>
-          <p:nvPr/>
-        </p:nvSpPr>
-        <p:spPr>
-          <a:xfrm>
-            <a:off x="457200" y="384048"/>
-            <a:ext cx="109728" cy="658368"/>
-          </a:xfrm>
-          <a:prstGeom prst="rect">
-            <a:avLst/>
-          </a:prstGeom>
-          <a:solidFill>
-            <a:srgbClr val="1E40AF"/>
-          </a:solidFill>
-          <a:ln>
-            <a:noFill/>
-          </a:ln>
-          <a:effectLst/>
-        </p:spPr>
-        <p:style>
-          <a:lnRef idx="1">
-            <a:schemeClr val="accent1"/>
-          </a:lnRef>
-          <a:fillRef idx="3">
-            <a:schemeClr val="accent1"/>
-          </a:fillRef>
-          <a:effectRef idx="2">
-            <a:schemeClr val="accent1"/>
-          </a:effectRef>
-          <a:fontRef idx="minor">
-            <a:schemeClr val="lt1"/>
-          </a:fontRef>
-        </p:style>
-        <p:txBody>
-          <a:bodyPr rtlCol="0" anchor="ctr"/>
-          <a:lstStyle/>
-          <a:p>
-            <a:pPr algn="ctr"/>
-          </a:p>
-        </p:txBody>
-      </p:sp>
-      <p:sp>
-        <p:nvSpPr>
-          <p:cNvPr id="3" name="TextBox 2"/>
-          <p:cNvSpPr txBox="1"/>
-          <p:nvPr/>
-        </p:nvSpPr>
-        <p:spPr>
-          <a:xfrm>
-            <a:off x="731520" y="274320"/>
-            <a:ext cx="10972800" cy="868680"/>
-          </a:xfrm>
-          <a:prstGeom prst="rect">
-            <a:avLst/>
-          </a:prstGeom>
-          <a:noFill/>
-        </p:spPr>
-        <p:txBody>
-          <a:bodyPr wrap="none" anchor="ctr">
-            <a:spAutoFit/>
-          </a:bodyPr>
-          <a:lstStyle/>
-          <a:p>
-            <a:r>
-              <a:rPr sz="3600" b="1">
-                <a:solidFill>
-                  <a:srgbClr val="1E40AF"/>
-                </a:solidFill>
-                <a:latin typeface="Arial"/>
-              </a:rPr>
-              <a:t>BÀI TẬP CỦA BẠN</a:t>
-            </a:r>
-          </a:p>
-        </p:txBody>
-      </p:sp>
-      <p:sp>
-        <p:nvSpPr>
-          <p:cNvPr id="4" name="Rectangle 3"/>
-          <p:cNvSpPr/>
-          <p:nvPr/>
-        </p:nvSpPr>
-        <p:spPr>
-          <a:xfrm>
-            <a:off x="457200" y="1207008"/>
-            <a:ext cx="11274552" cy="22000"/>
-          </a:xfrm>
-          <a:prstGeom prst="rect">
-            <a:avLst/>
-          </a:prstGeom>
-          <a:solidFill>
-            <a:srgbClr val="E2E8F0"/>
-          </a:solidFill>
-          <a:ln>
-            <a:noFill/>
-          </a:ln>
-          <a:effectLst/>
-        </p:spPr>
-        <p:style>
-          <a:lnRef idx="1">
-            <a:schemeClr val="accent1"/>
-          </a:lnRef>
-          <a:fillRef idx="3">
-            <a:schemeClr val="accent1"/>
-          </a:fillRef>
-          <a:effectRef idx="2">
-            <a:schemeClr val="accent1"/>
-          </a:effectRef>
-          <a:fontRef idx="minor">
-            <a:schemeClr val="lt1"/>
-          </a:fontRef>
-        </p:style>
-        <p:txBody>
-          <a:bodyPr rtlCol="0" anchor="ctr"/>
-          <a:lstStyle/>
-          <a:p>
-            <a:pPr algn="ctr"/>
-          </a:p>
-        </p:txBody>
-      </p:sp>
-      <p:sp>
-        <p:nvSpPr>
-          <p:cNvPr id="5" name="TextBox 4"/>
-          <p:cNvSpPr txBox="1"/>
-          <p:nvPr/>
-        </p:nvSpPr>
-        <p:spPr>
-          <a:xfrm>
-            <a:off x="457200" y="6355080"/>
-            <a:ext cx="11274552" cy="365760"/>
-          </a:xfrm>
-          <a:prstGeom prst="rect">
-            <a:avLst/>
-          </a:prstGeom>
-          <a:noFill/>
-        </p:spPr>
-        <p:txBody>
-          <a:bodyPr wrap="none">
-            <a:spAutoFit/>
-          </a:bodyPr>
-          <a:lstStyle/>
-          <a:p>
-            <a:pPr algn="r"/>
-            <a:r>
-              <a:rPr sz="1200">
-                <a:solidFill>
-                  <a:srgbClr val="64748B"/>
-                </a:solidFill>
-                <a:latin typeface="Calibri"/>
-              </a:rPr>
-              <a:t>Toán 10 · Bài 4. Hệ bất phương trình bậc nhất hai ẩn (STEM)          18</a:t>
-            </a:r>
-          </a:p>
-        </p:txBody>
-      </p:sp>
-      <p:sp>
-        <p:nvSpPr>
-          <p:cNvPr id="6" name="Rectangle 5"/>
-          <p:cNvSpPr/>
-          <p:nvPr/>
-        </p:nvSpPr>
-        <p:spPr>
-          <a:xfrm>
-            <a:off x="731520" y="1463040"/>
-            <a:ext cx="4572000" cy="4572000"/>
-          </a:xfrm>
-          <a:prstGeom prst="rect">
-            <a:avLst/>
-          </a:prstGeom>
-          <a:solidFill>
-            <a:srgbClr val="F8FAFC"/>
-          </a:solidFill>
-          <a:ln w="19050">
-            <a:solidFill>
-              <a:srgbClr val="E2E8F0"/>
-            </a:solidFill>
-          </a:ln>
-          <a:effectLst/>
-        </p:spPr>
-        <p:style>
-          <a:lnRef idx="1">
-            <a:schemeClr val="accent1"/>
-          </a:lnRef>
-          <a:fillRef idx="3">
-            <a:schemeClr val="accent1"/>
-          </a:fillRef>
-          <a:effectRef idx="2">
-            <a:schemeClr val="accent1"/>
-          </a:effectRef>
-          <a:fontRef idx="minor">
-            <a:schemeClr val="lt1"/>
-          </a:fontRef>
-        </p:style>
-        <p:txBody>
-          <a:bodyPr rtlCol="0" anchor="ctr"/>
-          <a:lstStyle/>
-          <a:p>
-            <a:pPr algn="ctr"/>
-          </a:p>
-        </p:txBody>
-      </p:sp>
-      <p:pic>
-        <p:nvPicPr>
-          <p:cNvPr id="7" name="Picture 6" descr="QR_CungCo_Bai4_Toan10.png"/>
-          <p:cNvPicPr>
-            <a:picLocks noChangeAspect="1"/>
-          </p:cNvPicPr>
-          <p:nvPr/>
-        </p:nvPicPr>
-        <p:blipFill>
-          <a:blip r:embed="rId2"/>
-          <a:stretch>
-            <a:fillRect/>
-          </a:stretch>
-        </p:blipFill>
-        <p:spPr>
-          <a:xfrm>
-            <a:off x="960120" y="1691640"/>
-            <a:ext cx="4114800" cy="4114800"/>
-          </a:xfrm>
-          <a:prstGeom prst="rect">
-            <a:avLst/>
-          </a:prstGeom>
-        </p:spPr>
-      </p:pic>
-      <p:sp>
-        <p:nvSpPr>
-          <p:cNvPr id="8" name="TextBox 7"/>
-          <p:cNvSpPr txBox="1"/>
-          <p:nvPr/>
-        </p:nvSpPr>
-        <p:spPr>
-          <a:xfrm>
-            <a:off x="5760720" y="1554480"/>
-            <a:ext cx="6035040" cy="3108960"/>
-          </a:xfrm>
-          <a:prstGeom prst="rect">
-            <a:avLst/>
-          </a:prstGeom>
-          <a:noFill/>
-        </p:spPr>
-        <p:txBody>
-          <a:bodyPr wrap="square" anchor="t">
-            <a:spAutoFit/>
-          </a:bodyPr>
-          <a:lstStyle/>
-          <a:p>
-            <a:pPr algn="l" marL="365760" indent="-365760">
-              <a:spcAft>
-                <a:spcPts val="1000"/>
-              </a:spcAft>
-              <a:buClr>
-                <a:srgbClr val="1E40AF"/>
-              </a:buClr>
-              <a:buFont typeface="Arial"/>
-              <a:buChar char="•"/>
-            </a:pPr>
-            <a:r>
-              <a:rPr sz="2600">
-                <a:solidFill>
-                  <a:srgbClr val="1E293B"/>
-                </a:solidFill>
-                <a:latin typeface="Calibri"/>
-              </a:rPr>
-              <a:t>Quét mã QR bằng điện thoại</a:t>
-            </a:r>
-          </a:p>
-          <a:p>
-            <a:pPr algn="l" marL="365760" indent="-365760">
-              <a:spcAft>
-                <a:spcPts val="1000"/>
-              </a:spcAft>
-              <a:buClr>
-                <a:srgbClr val="1E40AF"/>
-              </a:buClr>
-              <a:buFont typeface="Arial"/>
-              <a:buChar char="•"/>
-            </a:pPr>
-            <a:r>
-              <a:rPr sz="2600">
-                <a:solidFill>
-                  <a:srgbClr val="1E293B"/>
-                </a:solidFill>
-                <a:latin typeface="Calibri"/>
-              </a:rPr>
-              <a:t>Nhập họ tên và lớp</a:t>
-            </a:r>
-          </a:p>
-          <a:p>
-            <a:pPr algn="l" marL="365760" indent="-365760">
-              <a:spcAft>
-                <a:spcPts val="1000"/>
-              </a:spcAft>
-              <a:buClr>
-                <a:srgbClr val="1E40AF"/>
-              </a:buClr>
-              <a:buFont typeface="Arial"/>
-              <a:buChar char="•"/>
-            </a:pPr>
-            <a:r>
-              <a:rPr sz="2600">
-                <a:solidFill>
-                  <a:srgbClr val="1E293B"/>
-                </a:solidFill>
-                <a:latin typeface="Calibri"/>
-              </a:rPr>
-              <a:t>7 câu – làm trong 7 phút</a:t>
-            </a:r>
-          </a:p>
-          <a:p>
-            <a:pPr algn="l" marL="365760" indent="-365760">
-              <a:spcAft>
-                <a:spcPts val="1000"/>
-              </a:spcAft>
-              <a:buClr>
-                <a:srgbClr val="1E40AF"/>
-              </a:buClr>
-              <a:buFont typeface="Arial"/>
-              <a:buChar char="•"/>
-            </a:pPr>
-            <a:r>
-              <a:rPr sz="2600">
-                <a:solidFill>
-                  <a:srgbClr val="1E293B"/>
-                </a:solidFill>
-                <a:latin typeface="Calibri"/>
-              </a:rPr>
-              <a:t>Nộp bài, xem lời giải</a:t>
-            </a:r>
-          </a:p>
-        </p:txBody>
-      </p:sp>
-      <p:sp>
-        <p:nvSpPr>
-          <p:cNvPr id="9" name="TextBox 8"/>
-          <p:cNvSpPr txBox="1"/>
-          <p:nvPr/>
-        </p:nvSpPr>
-        <p:spPr>
-          <a:xfrm>
-            <a:off x="5760720" y="4754880"/>
-            <a:ext cx="6035040" cy="1188720"/>
-          </a:xfrm>
-          <a:prstGeom prst="rect">
-            <a:avLst/>
-          </a:prstGeom>
-          <a:noFill/>
-        </p:spPr>
-        <p:txBody>
-          <a:bodyPr wrap="square" anchor="t">
-            <a:spAutoFit/>
-          </a:bodyPr>
-          <a:lstStyle/>
-          <a:p>
-            <a:pPr algn="l">
-              <a:spcAft>
-                <a:spcPts val="1000"/>
-              </a:spcAft>
-            </a:pPr>
-            <a:r>
-              <a:rPr sz="1800" b="1">
-                <a:solidFill>
-                  <a:srgbClr val="1E40AF"/>
-                </a:solidFill>
-                <a:latin typeface="Calibri"/>
-                <a:hlinkClick r:id="rId3"/>
-              </a:rPr>
-              <a:t>trangtu66.github.io/Taode_thi_online/cc_bai4_t10.html</a:t>
-            </a:r>
-          </a:p>
-        </p:txBody>
-      </p:sp>
-    </p:spTree>
-  </p:cSld>
-  <p:clrMapOvr>
-    <a:masterClrMapping/>
-  </p:clrMapOvr>
-</p:sld>
-</file>
-
-<file path=ppt/slides/slide16.xml><?xml version="1.0" encoding="utf-8"?>
-<p:sld xmlns:a="http://schemas.openxmlformats.org/drawingml/2006/main" xmlns:p="http://schemas.openxmlformats.org/presentationml/2006/main" xmlns:r="http://schemas.openxmlformats.org/officeDocument/2006/relationships">
-  <p:cSld>
-    <p:bg>
-      <p:bgPr>
-        <a:solidFill>
-          <a:srgbClr val="FFFFFF"/>
-        </a:solidFill>
-        <a:effectLst/>
-      </p:bgPr>
-    </p:bg>
-    <p:spTree>
-      <p:nvGrpSpPr>
-        <p:cNvPr id="1" name=""/>
-        <p:cNvGrpSpPr/>
-        <p:nvPr/>
-      </p:nvGrpSpPr>
-      <p:grpSpPr/>
-      <p:sp>
-        <p:nvSpPr>
-          <p:cNvPr id="2" name="Rectangle 1"/>
-          <p:cNvSpPr/>
-          <p:nvPr/>
-        </p:nvSpPr>
-        <p:spPr>
-          <a:xfrm>
-            <a:off x="457200" y="384048"/>
-            <a:ext cx="109728" cy="658368"/>
-          </a:xfrm>
-          <a:prstGeom prst="rect">
-            <a:avLst/>
-          </a:prstGeom>
-          <a:solidFill>
-            <a:srgbClr val="1E40AF"/>
-          </a:solidFill>
-          <a:ln>
-            <a:noFill/>
-          </a:ln>
-          <a:effectLst/>
-        </p:spPr>
-        <p:style>
-          <a:lnRef idx="1">
-            <a:schemeClr val="accent1"/>
-          </a:lnRef>
-          <a:fillRef idx="3">
-            <a:schemeClr val="accent1"/>
-          </a:fillRef>
-          <a:effectRef idx="2">
-            <a:schemeClr val="accent1"/>
-          </a:effectRef>
-          <a:fontRef idx="minor">
-            <a:schemeClr val="lt1"/>
-          </a:fontRef>
-        </p:style>
-        <p:txBody>
-          <a:bodyPr rtlCol="0" anchor="ctr"/>
-          <a:lstStyle/>
-          <a:p>
-            <a:pPr algn="ctr"/>
-          </a:p>
-        </p:txBody>
-      </p:sp>
-      <p:sp>
-        <p:nvSpPr>
-          <p:cNvPr id="3" name="TextBox 2"/>
-          <p:cNvSpPr txBox="1"/>
-          <p:nvPr/>
-        </p:nvSpPr>
-        <p:spPr>
-          <a:xfrm>
-            <a:off x="731520" y="274320"/>
-            <a:ext cx="10972800" cy="868680"/>
-          </a:xfrm>
-          <a:prstGeom prst="rect">
-            <a:avLst/>
-          </a:prstGeom>
-          <a:noFill/>
-        </p:spPr>
-        <p:txBody>
-          <a:bodyPr wrap="none" anchor="ctr">
-            <a:spAutoFit/>
-          </a:bodyPr>
-          <a:lstStyle/>
-          <a:p>
-            <a:r>
-              <a:rPr sz="3600" b="1">
-                <a:solidFill>
-                  <a:srgbClr val="1E40AF"/>
-                </a:solidFill>
-                <a:latin typeface="Arial"/>
-              </a:rPr>
-              <a:t>LUYỆN TẬP 2.4 – 2.5 – LỜI GIẢI</a:t>
-            </a:r>
-          </a:p>
-        </p:txBody>
-      </p:sp>
-      <p:sp>
-        <p:nvSpPr>
-          <p:cNvPr id="4" name="Rectangle 3"/>
-          <p:cNvSpPr/>
-          <p:nvPr/>
-        </p:nvSpPr>
-        <p:spPr>
-          <a:xfrm>
-            <a:off x="457200" y="1207008"/>
-            <a:ext cx="11274552" cy="22000"/>
-          </a:xfrm>
-          <a:prstGeom prst="rect">
-            <a:avLst/>
-          </a:prstGeom>
-          <a:solidFill>
-            <a:srgbClr val="E2E8F0"/>
-          </a:solidFill>
-          <a:ln>
-            <a:noFill/>
-          </a:ln>
-          <a:effectLst/>
-        </p:spPr>
-        <p:style>
-          <a:lnRef idx="1">
-            <a:schemeClr val="accent1"/>
-          </a:lnRef>
-          <a:fillRef idx="3">
-            <a:schemeClr val="accent1"/>
-          </a:fillRef>
-          <a:effectRef idx="2">
-            <a:schemeClr val="accent1"/>
-          </a:effectRef>
-          <a:fontRef idx="minor">
-            <a:schemeClr val="lt1"/>
-          </a:fontRef>
-        </p:style>
-        <p:txBody>
-          <a:bodyPr rtlCol="0" anchor="ctr"/>
-          <a:lstStyle/>
-          <a:p>
-            <a:pPr algn="ctr"/>
-          </a:p>
-        </p:txBody>
-      </p:sp>
-      <p:sp>
-        <p:nvSpPr>
-          <p:cNvPr id="5" name="TextBox 4"/>
-          <p:cNvSpPr txBox="1"/>
-          <p:nvPr/>
-        </p:nvSpPr>
-        <p:spPr>
-          <a:xfrm>
-            <a:off x="457200" y="6355080"/>
-            <a:ext cx="11274552" cy="365760"/>
-          </a:xfrm>
-          <a:prstGeom prst="rect">
-            <a:avLst/>
-          </a:prstGeom>
-          <a:noFill/>
-        </p:spPr>
-        <p:txBody>
-          <a:bodyPr wrap="none">
-            <a:spAutoFit/>
-          </a:bodyPr>
-          <a:lstStyle/>
-          <a:p>
-            <a:pPr algn="r"/>
-            <a:r>
-              <a:rPr sz="1200">
-                <a:solidFill>
-                  <a:srgbClr val="64748B"/>
-                </a:solidFill>
-                <a:latin typeface="Calibri"/>
-              </a:rPr>
-              <a:t>Toán 10 · Bài 4. Hệ bất phương trình bậc nhất hai ẩn (STEM)          16</a:t>
-            </a:r>
-          </a:p>
-        </p:txBody>
-      </p:sp>
-      <mc:AlternateContent xmlns:mc="http://schemas.openxmlformats.org/markup-compatibility/2006">
-        <mc:Choice xmlns:a14="http://schemas.microsoft.com/office/drawing/2010/main" Requires="a14">
-          <p:sp>
-            <p:nvSpPr>
-              <p:cNvPr id="6" name="TextBox 5"/>
-              <p:cNvSpPr txBox="1"/>
-              <p:nvPr/>
-            </p:nvSpPr>
-            <p:spPr>
-              <a:xfrm>
-                <a:off x="731520" y="1508760"/>
-                <a:ext cx="10789920" cy="2039112"/>
-              </a:xfrm>
-              <a:prstGeom prst="rect">
-                <a:avLst/>
-              </a:prstGeom>
-              <a:noFill/>
-            </p:spPr>
-            <p:txBody>
-              <a:bodyPr wrap="square" anchor="t">
-                <a:spAutoFit/>
-              </a:bodyPr>
-              <a:lstStyle/>
-              <a:p>
-                <a:pPr algn="l">
-                  <a:spcAft>
-                    <a:spcPts val="1000"/>
-                  </a:spcAft>
-                </a:pPr>
-                <a:r>
-                  <a:rPr sz="2400" b="1">
-                    <a:solidFill>
-                      <a:srgbClr val="1E40AF"/>
-                    </a:solidFill>
-                    <a:latin typeface="Calibri"/>
-                  </a:rPr>
-                  <a:t>2.4. Hệ bậc nhất hai ẩn: a) và d)</a:t>
-                </a:r>
-              </a:p>
-              <a:p>
-                <a:pPr algn="l" marL="365760" indent="-365760">
-                  <a:spcAft>
-                    <a:spcPts val="1000"/>
-                  </a:spcAft>
-                  <a:buClr>
-                    <a:srgbClr val="1E40AF"/>
-                  </a:buClr>
-                  <a:buFont typeface="Arial"/>
-                  <a:buChar char="•"/>
-                </a:pPr>
-                <a:r>
-                  <a:rPr sz="2400">
-                    <a:solidFill>
-                      <a:srgbClr val="1E293B"/>
-                    </a:solidFill>
-                    <a:latin typeface="Calibri"/>
-                  </a:rPr>
-                  <a:t>2.5b) </a:t>
-                </a:r>
-                <a14:m>
-                  <m:oMath xmlns:m="http://schemas.openxmlformats.org/officeDocument/2006/math">
-                    <m:d>
-                      <m:dPr>
-                        <m:begChr m:val="{"/>
-                        <m:sepChr m:val=""/>
-                        <m:endChr m:val=""/>
-                      </m:dPr>
-                      <m:e>
-                        <m:eqArr>
-                          <m:e>
-                            <m:r>
-                              <a:rPr lang="vi-VN" sz="2400" b="0">
-                                <a:solidFill>
-                                  <a:srgbClr val="1E293B"/>
-                                </a:solidFill>
-                                <a:latin typeface="Cambria Math" panose="02040503050406030204" pitchFamily="18" charset="0"/>
-                              </a:rPr>
-                              <m:t>&amp;</m:t>
-                            </m:r>
-                            <m:r>
-                              <a:rPr lang="vi-VN" sz="2400" b="0">
-                                <a:solidFill>
-                                  <a:srgbClr val="1E293B"/>
-                                </a:solidFill>
-                                <a:latin typeface="Cambria Math" panose="02040503050406030204" pitchFamily="18" charset="0"/>
-                              </a:rPr>
-                              <m:t>x≥0</m:t>
-                            </m:r>
-                          </m:e>
-                          <m:e>
-                            <m:r>
-                              <a:rPr lang="vi-VN" sz="2400" b="0">
-                                <a:solidFill>
-                                  <a:srgbClr val="1E293B"/>
-                                </a:solidFill>
-                                <a:latin typeface="Cambria Math" panose="02040503050406030204" pitchFamily="18" charset="0"/>
-                              </a:rPr>
-                              <m:t>&amp;</m:t>
-                            </m:r>
-                            <m:r>
-                              <a:rPr lang="vi-VN" sz="2400" b="0">
-                                <a:solidFill>
-                                  <a:srgbClr val="1E293B"/>
-                                </a:solidFill>
-                                <a:latin typeface="Cambria Math" panose="02040503050406030204" pitchFamily="18" charset="0"/>
-                              </a:rPr>
-                              <m:t>y≥0</m:t>
-                            </m:r>
-                          </m:e>
-                          <m:e>
-                            <m:r>
-                              <a:rPr lang="vi-VN" sz="2400" b="0">
-                                <a:solidFill>
-                                  <a:srgbClr val="1E293B"/>
-                                </a:solidFill>
-                                <a:latin typeface="Cambria Math" panose="02040503050406030204" pitchFamily="18" charset="0"/>
-                              </a:rPr>
-                              <m:t>&amp;</m:t>
-                            </m:r>
-                            <m:r>
-                              <a:rPr lang="vi-VN" sz="2400" b="0">
-                                <a:solidFill>
-                                  <a:srgbClr val="1E293B"/>
-                                </a:solidFill>
-                                <a:latin typeface="Cambria Math" panose="02040503050406030204" pitchFamily="18" charset="0"/>
-                              </a:rPr>
-                              <m:t>2x+y≤4</m:t>
-                            </m:r>
-                          </m:e>
-                        </m:eqArr>
-                      </m:e>
-                    </m:d>
-                  </m:oMath>
-                </a14:m>
-                <a:r>
-                  <a:rPr sz="2400">
-                    <a:solidFill>
-                      <a:srgbClr val="1E293B"/>
-                    </a:solidFill>
-                    <a:latin typeface="Calibri"/>
-                  </a:rPr>
-                  <a:t>  tam giác O(0; 0), A(0; 4), B(2; 0)</a:t>
-                </a:r>
-              </a:p>
-            </p:txBody>
-          </p:sp>
-        </mc:Choice>
-        <mc:Fallback>
-          <p:sp>
-            <p:nvSpPr>
-              <p:cNvPr id="6" name="TextBox 5"/>
-              <p:cNvSpPr txBox="1"/>
-              <p:nvPr/>
-            </p:nvSpPr>
-            <p:spPr>
-              <a:xfrm>
-                <a:off x="731520" y="1508760"/>
-                <a:ext cx="10789920" cy="2039112"/>
-              </a:xfrm>
-              <a:prstGeom prst="rect">
-                <a:avLst/>
-              </a:prstGeom>
-              <a:noFill/>
-            </p:spPr>
-            <p:txBody>
-              <a:bodyPr wrap="square" anchor="t">
-                <a:spAutoFit/>
-              </a:bodyPr>
-              <a:lstStyle/>
-              <a:p>
-                <a:pPr algn="l">
-                  <a:spcAft>
-                    <a:spcPts val="1000"/>
-                  </a:spcAft>
-                </a:pPr>
-                <a:r>
-                  <a:rPr sz="2400" b="1">
-                    <a:solidFill>
-                      <a:srgbClr val="1E40AF"/>
-                    </a:solidFill>
-                    <a:latin typeface="Calibri"/>
-                  </a:rPr>
-                  <a:t>2.4. Hệ bậc nhất hai ẩn: a) và d)</a:t>
-                </a:r>
-              </a:p>
-              <a:p>
-                <a:pPr algn="l" marL="365760" indent="-365760">
-                  <a:spcAft>
-                    <a:spcPts val="1000"/>
-                  </a:spcAft>
-                  <a:buClr>
-                    <a:srgbClr val="1E40AF"/>
-                  </a:buClr>
-                  <a:buFont typeface="Arial"/>
-                  <a:buChar char="•"/>
-                </a:pPr>
-                <a:r>
-                  <a:rPr sz="2400">
-                    <a:solidFill>
-                      <a:srgbClr val="1E293B"/>
-                    </a:solidFill>
-                    <a:latin typeface="Calibri"/>
-                  </a:rPr>
-                  <a:t>2.5b) </a:t>
-                </a:r>
-                <a:r>
-                  <a:rPr lang="vi-VN"/>
-                  <a:t>\begin{cases}x\ge 0\\y\ge 0\\2x+y\le 4\end{cases}</a:t>
-                </a:r>
-                <a:r>
-                  <a:rPr sz="2400">
-                    <a:solidFill>
-                      <a:srgbClr val="1E293B"/>
-                    </a:solidFill>
-                    <a:latin typeface="Calibri"/>
-                  </a:rPr>
-                  <a:t>  tam giác O(0; 0), A(0; 4), B(2; 0)</a:t>
-                </a:r>
-              </a:p>
-            </p:txBody>
-          </p:sp>
-        </mc:Fallback>
-      </mc:AlternateContent>
-      <p:sp>
-        <p:nvSpPr>
-          <p:cNvPr id="7" name="Rounded Rectangle 6"/>
-          <p:cNvSpPr/>
-          <p:nvPr/>
-        </p:nvSpPr>
-        <p:spPr>
-          <a:xfrm>
-            <a:off x="731520" y="3685032"/>
-            <a:ext cx="8686800" cy="685800"/>
-          </a:xfrm>
-          <a:prstGeom prst="roundRect">
-            <a:avLst>
-              <a:gd name="adj" fmla="val 8000"/>
-            </a:avLst>
-          </a:prstGeom>
-          <a:solidFill>
-            <a:srgbClr val="FEF2F2"/>
-          </a:solidFill>
-          <a:ln w="19050">
-            <a:solidFill>
-              <a:srgbClr val="991B1B"/>
-            </a:solidFill>
-          </a:ln>
-          <a:effectLst/>
-        </p:spPr>
-        <p:style>
-          <a:lnRef idx="1">
-            <a:schemeClr val="accent1"/>
-          </a:lnRef>
-          <a:fillRef idx="3">
-            <a:schemeClr val="accent1"/>
-          </a:fillRef>
-          <a:effectRef idx="2">
-            <a:schemeClr val="accent1"/>
-          </a:effectRef>
-          <a:fontRef idx="minor">
-            <a:schemeClr val="lt1"/>
-          </a:fontRef>
-        </p:style>
-        <p:txBody>
-          <a:bodyPr rtlCol="0" anchor="ctr"/>
-          <a:lstStyle/>
-          <a:p>
-            <a:pPr algn="ctr"/>
-          </a:p>
-        </p:txBody>
-      </p:sp>
-      <p:sp>
-        <p:nvSpPr>
-          <p:cNvPr id="8" name="TextBox 7"/>
-          <p:cNvSpPr txBox="1"/>
-          <p:nvPr/>
-        </p:nvSpPr>
-        <p:spPr>
-          <a:xfrm>
-            <a:off x="914400" y="3685032"/>
-            <a:ext cx="8321040" cy="685800"/>
-          </a:xfrm>
-          <a:prstGeom prst="rect">
-            <a:avLst/>
-          </a:prstGeom>
-          <a:noFill/>
-        </p:spPr>
-        <p:txBody>
-          <a:bodyPr wrap="square" anchor="ctr">
-            <a:spAutoFit/>
-          </a:bodyPr>
-          <a:lstStyle/>
-          <a:p>
-            <a:pPr algn="l">
-              <a:spcAft>
-                <a:spcPts val="400"/>
-              </a:spcAft>
-            </a:pPr>
-            <a:r>
-              <a:rPr sz="2400" b="1">
-                <a:solidFill>
-                  <a:srgbClr val="991B1B"/>
-                </a:solidFill>
-                <a:latin typeface="Calibri"/>
-              </a:rPr>
-              <a:t>Kể cả các cạnh (dấu ≤, ≥)</a:t>
-            </a:r>
-          </a:p>
-        </p:txBody>
-      </p:sp>
-    </p:spTree>
-  </p:cSld>
-  <p:clrMapOvr>
-    <a:masterClrMapping/>
-  </p:clrMapOvr>
-</p:sld>
-</file>
-
-<file path=ppt/slides/slide17.xml><?xml version="1.0" encoding="utf-8"?>
-<p:sld xmlns:a="http://schemas.openxmlformats.org/drawingml/2006/main" xmlns:p="http://schemas.openxmlformats.org/presentationml/2006/main" xmlns:r="http://schemas.openxmlformats.org/officeDocument/2006/relationships">
-  <p:cSld>
-    <p:bg>
-      <p:bgPr>
-        <a:solidFill>
-          <a:srgbClr val="FFFFFF"/>
-        </a:solidFill>
-        <a:effectLst/>
-      </p:bgPr>
-    </p:bg>
-    <p:spTree>
-      <p:nvGrpSpPr>
-        <p:cNvPr id="1" name=""/>
-        <p:cNvGrpSpPr/>
-        <p:nvPr/>
-      </p:nvGrpSpPr>
-      <p:grpSpPr/>
-      <p:sp>
-        <p:nvSpPr>
-          <p:cNvPr id="2" name="Rectangle 1"/>
-          <p:cNvSpPr/>
-          <p:nvPr/>
-        </p:nvSpPr>
-        <p:spPr>
-          <a:xfrm>
-            <a:off x="457200" y="384048"/>
-            <a:ext cx="109728" cy="658368"/>
-          </a:xfrm>
-          <a:prstGeom prst="rect">
-            <a:avLst/>
-          </a:prstGeom>
-          <a:solidFill>
-            <a:srgbClr val="1E40AF"/>
-          </a:solidFill>
-          <a:ln>
-            <a:noFill/>
-          </a:ln>
-          <a:effectLst/>
-        </p:spPr>
-        <p:style>
-          <a:lnRef idx="1">
-            <a:schemeClr val="accent1"/>
-          </a:lnRef>
-          <a:fillRef idx="3">
-            <a:schemeClr val="accent1"/>
-          </a:fillRef>
-          <a:effectRef idx="2">
-            <a:schemeClr val="accent1"/>
-          </a:effectRef>
-          <a:fontRef idx="minor">
-            <a:schemeClr val="lt1"/>
-          </a:fontRef>
-        </p:style>
-        <p:txBody>
-          <a:bodyPr rtlCol="0" anchor="ctr"/>
-          <a:lstStyle/>
-          <a:p>
-            <a:pPr algn="ctr"/>
-          </a:p>
-        </p:txBody>
-      </p:sp>
-      <p:sp>
-        <p:nvSpPr>
-          <p:cNvPr id="3" name="TextBox 2"/>
-          <p:cNvSpPr txBox="1"/>
-          <p:nvPr/>
-        </p:nvSpPr>
-        <p:spPr>
-          <a:xfrm>
-            <a:off x="731520" y="274320"/>
-            <a:ext cx="10972800" cy="868680"/>
-          </a:xfrm>
-          <a:prstGeom prst="rect">
-            <a:avLst/>
-          </a:prstGeom>
-          <a:noFill/>
-        </p:spPr>
-        <p:txBody>
-          <a:bodyPr wrap="none" anchor="ctr">
-            <a:spAutoFit/>
-          </a:bodyPr>
-          <a:lstStyle/>
-          <a:p>
-            <a:r>
-              <a:rPr sz="3600" b="1">
-                <a:solidFill>
-                  <a:srgbClr val="1E40AF"/>
-                </a:solidFill>
-                <a:latin typeface="Arial"/>
-              </a:rPr>
-              <a:t>BẢNG THỬ NGHIỆM – LỜI GIẢI</a:t>
+              <a:t>VÍ DỤ: BẢNG THỬ NGHIỆM</a:t>
             </a:r>
           </a:p>
         </p:txBody>
@@ -6967,6 +5896,1346 @@
           </a:graphicData>
         </a:graphic>
       </p:graphicFrame>
+      <p:sp>
+        <p:nvSpPr>
+          <p:cNvPr id="8" name="Rounded Rectangle 7"/>
+          <p:cNvSpPr/>
+          <p:nvPr/>
+        </p:nvSpPr>
+        <p:spPr>
+          <a:xfrm>
+            <a:off x="10463479" y="457200"/>
+            <a:ext cx="1179576" cy="457200"/>
+          </a:xfrm>
+          <a:prstGeom prst="roundRect">
+            <a:avLst/>
+          </a:prstGeom>
+          <a:solidFill>
+            <a:srgbClr val="166534"/>
+          </a:solidFill>
+          <a:ln>
+            <a:noFill/>
+          </a:ln>
+          <a:effectLst/>
+        </p:spPr>
+        <p:style>
+          <a:lnRef idx="1">
+            <a:schemeClr val="accent1"/>
+          </a:lnRef>
+          <a:fillRef idx="3">
+            <a:schemeClr val="accent1"/>
+          </a:fillRef>
+          <a:effectRef idx="2">
+            <a:schemeClr val="accent1"/>
+          </a:effectRef>
+          <a:fontRef idx="minor">
+            <a:schemeClr val="lt1"/>
+          </a:fontRef>
+        </p:style>
+        <p:txBody>
+          <a:bodyPr rtlCol="0" anchor="ctr" tIns="0" bIns="0"/>
+          <a:lstStyle/>
+          <a:p>
+            <a:pPr algn="ctr"/>
+            <a:r>
+              <a:rPr sz="1400" b="1">
+                <a:solidFill>
+                  <a:srgbClr val="FFFFFF"/>
+                </a:solidFill>
+                <a:latin typeface="Arial"/>
+              </a:rPr>
+              <a:t>LỜI GIẢI</a:t>
+            </a:r>
+          </a:p>
+        </p:txBody>
+      </p:sp>
+    </p:spTree>
+  </p:cSld>
+  <p:clrMapOvr>
+    <a:masterClrMapping/>
+  </p:clrMapOvr>
+</p:sld>
+</file>
+
+<file path=ppt/slides/slide15.xml><?xml version="1.0" encoding="utf-8"?>
+<p:sld xmlns:a="http://schemas.openxmlformats.org/drawingml/2006/main" xmlns:p="http://schemas.openxmlformats.org/presentationml/2006/main" xmlns:r="http://schemas.openxmlformats.org/officeDocument/2006/relationships">
+  <p:cSld>
+    <p:bg>
+      <p:bgPr>
+        <a:solidFill>
+          <a:srgbClr val="FFFFFF"/>
+        </a:solidFill>
+        <a:effectLst/>
+      </p:bgPr>
+    </p:bg>
+    <p:spTree>
+      <p:nvGrpSpPr>
+        <p:cNvPr id="1" name=""/>
+        <p:cNvGrpSpPr/>
+        <p:nvPr/>
+      </p:nvGrpSpPr>
+      <p:grpSpPr/>
+      <p:sp>
+        <p:nvSpPr>
+          <p:cNvPr id="2" name="Rectangle 1"/>
+          <p:cNvSpPr/>
+          <p:nvPr/>
+        </p:nvSpPr>
+        <p:spPr>
+          <a:xfrm>
+            <a:off x="457200" y="384048"/>
+            <a:ext cx="109728" cy="658368"/>
+          </a:xfrm>
+          <a:prstGeom prst="rect">
+            <a:avLst/>
+          </a:prstGeom>
+          <a:solidFill>
+            <a:srgbClr val="1E40AF"/>
+          </a:solidFill>
+          <a:ln>
+            <a:noFill/>
+          </a:ln>
+          <a:effectLst/>
+        </p:spPr>
+        <p:style>
+          <a:lnRef idx="1">
+            <a:schemeClr val="accent1"/>
+          </a:lnRef>
+          <a:fillRef idx="3">
+            <a:schemeClr val="accent1"/>
+          </a:fillRef>
+          <a:effectRef idx="2">
+            <a:schemeClr val="accent1"/>
+          </a:effectRef>
+          <a:fontRef idx="minor">
+            <a:schemeClr val="lt1"/>
+          </a:fontRef>
+        </p:style>
+        <p:txBody>
+          <a:bodyPr rtlCol="0" anchor="ctr"/>
+          <a:lstStyle/>
+          <a:p>
+            <a:pPr algn="ctr"/>
+          </a:p>
+        </p:txBody>
+      </p:sp>
+      <p:sp>
+        <p:nvSpPr>
+          <p:cNvPr id="3" name="TextBox 2"/>
+          <p:cNvSpPr txBox="1"/>
+          <p:nvPr/>
+        </p:nvSpPr>
+        <p:spPr>
+          <a:xfrm>
+            <a:off x="731520" y="274320"/>
+            <a:ext cx="9848088" cy="868680"/>
+          </a:xfrm>
+          <a:prstGeom prst="rect">
+            <a:avLst/>
+          </a:prstGeom>
+          <a:noFill/>
+        </p:spPr>
+        <p:txBody>
+          <a:bodyPr wrap="none" anchor="ctr">
+            <a:spAutoFit/>
+          </a:bodyPr>
+          <a:lstStyle/>
+          <a:p>
+            <a:r>
+              <a:rPr sz="3600" b="1">
+                <a:solidFill>
+                  <a:srgbClr val="1E40AF"/>
+                </a:solidFill>
+                <a:latin typeface="Arial"/>
+              </a:rPr>
+              <a:t>LUYỆN TẬP 2.4 – 2.5</a:t>
+            </a:r>
+          </a:p>
+        </p:txBody>
+      </p:sp>
+      <p:sp>
+        <p:nvSpPr>
+          <p:cNvPr id="4" name="Rectangle 3"/>
+          <p:cNvSpPr/>
+          <p:nvPr/>
+        </p:nvSpPr>
+        <p:spPr>
+          <a:xfrm>
+            <a:off x="457200" y="1207008"/>
+            <a:ext cx="11274552" cy="22000"/>
+          </a:xfrm>
+          <a:prstGeom prst="rect">
+            <a:avLst/>
+          </a:prstGeom>
+          <a:solidFill>
+            <a:srgbClr val="E2E8F0"/>
+          </a:solidFill>
+          <a:ln>
+            <a:noFill/>
+          </a:ln>
+          <a:effectLst/>
+        </p:spPr>
+        <p:style>
+          <a:lnRef idx="1">
+            <a:schemeClr val="accent1"/>
+          </a:lnRef>
+          <a:fillRef idx="3">
+            <a:schemeClr val="accent1"/>
+          </a:fillRef>
+          <a:effectRef idx="2">
+            <a:schemeClr val="accent1"/>
+          </a:effectRef>
+          <a:fontRef idx="minor">
+            <a:schemeClr val="lt1"/>
+          </a:fontRef>
+        </p:style>
+        <p:txBody>
+          <a:bodyPr rtlCol="0" anchor="ctr"/>
+          <a:lstStyle/>
+          <a:p>
+            <a:pPr algn="ctr"/>
+          </a:p>
+        </p:txBody>
+      </p:sp>
+      <p:sp>
+        <p:nvSpPr>
+          <p:cNvPr id="5" name="TextBox 4"/>
+          <p:cNvSpPr txBox="1"/>
+          <p:nvPr/>
+        </p:nvSpPr>
+        <p:spPr>
+          <a:xfrm>
+            <a:off x="457200" y="6355080"/>
+            <a:ext cx="11274552" cy="365760"/>
+          </a:xfrm>
+          <a:prstGeom prst="rect">
+            <a:avLst/>
+          </a:prstGeom>
+          <a:noFill/>
+        </p:spPr>
+        <p:txBody>
+          <a:bodyPr wrap="none">
+            <a:spAutoFit/>
+          </a:bodyPr>
+          <a:lstStyle/>
+          <a:p>
+            <a:pPr algn="r"/>
+            <a:r>
+              <a:rPr sz="1200">
+                <a:solidFill>
+                  <a:srgbClr val="64748B"/>
+                </a:solidFill>
+                <a:latin typeface="Calibri"/>
+              </a:rPr>
+              <a:t>Toán 10 · Bài 4. Hệ bất phương trình bậc nhất hai ẩn (STEM)          15</a:t>
+            </a:r>
+          </a:p>
+        </p:txBody>
+      </p:sp>
+      <mc:AlternateContent xmlns:mc="http://schemas.openxmlformats.org/markup-compatibility/2006">
+        <mc:Choice xmlns:a14="http://schemas.microsoft.com/office/drawing/2010/main" Requires="a14">
+          <p:sp>
+            <p:nvSpPr>
+              <p:cNvPr id="6" name="TextBox 5"/>
+              <p:cNvSpPr txBox="1"/>
+              <p:nvPr/>
+            </p:nvSpPr>
+            <p:spPr>
+              <a:xfrm>
+                <a:off x="731520" y="1508760"/>
+                <a:ext cx="10789920" cy="2039112"/>
+              </a:xfrm>
+              <a:prstGeom prst="rect">
+                <a:avLst/>
+              </a:prstGeom>
+              <a:noFill/>
+            </p:spPr>
+            <p:txBody>
+              <a:bodyPr wrap="square" anchor="t">
+                <a:spAutoFit/>
+              </a:bodyPr>
+              <a:lstStyle/>
+              <a:p>
+                <a:pPr algn="l" marL="365760" indent="-365760">
+                  <a:spcAft>
+                    <a:spcPts val="1000"/>
+                  </a:spcAft>
+                  <a:buClr>
+                    <a:srgbClr val="1E40AF"/>
+                  </a:buClr>
+                  <a:buFont typeface="Arial"/>
+                  <a:buChar char="•"/>
+                </a:pPr>
+                <a:r>
+                  <a:rPr sz="2400">
+                    <a:solidFill>
+                      <a:srgbClr val="1E293B"/>
+                    </a:solidFill>
+                    <a:latin typeface="Calibri"/>
+                  </a:rPr>
+                  <a:t>2.4. Hệ nào là hệ bậc nhất hai ẩn?</a:t>
+                </a:r>
+              </a:p>
+              <a:p>
+                <a:pPr algn="l" marL="365760" indent="-365760">
+                  <a:spcAft>
+                    <a:spcPts val="1000"/>
+                  </a:spcAft>
+                  <a:buClr>
+                    <a:srgbClr val="1E40AF"/>
+                  </a:buClr>
+                  <a:buFont typeface="Arial"/>
+                  <a:buChar char="•"/>
+                </a:pPr>
+                <a:r>
+                  <a:rPr sz="2400">
+                    <a:solidFill>
+                      <a:srgbClr val="1E293B"/>
+                    </a:solidFill>
+                    <a:latin typeface="Calibri"/>
+                  </a:rPr>
+                  <a:t>2.5b) Miền nghiệm: </a:t>
+                </a:r>
+                <a14:m>
+                  <m:oMath xmlns:m="http://schemas.openxmlformats.org/officeDocument/2006/math">
+                    <m:d>
+                      <m:dPr>
+                        <m:begChr m:val="{"/>
+                        <m:sepChr m:val=""/>
+                        <m:endChr m:val=""/>
+                      </m:dPr>
+                      <m:e>
+                        <m:eqArr>
+                          <m:e>
+                            <m:r>
+                              <a:rPr lang="vi-VN" sz="2400" b="0">
+                                <a:solidFill>
+                                  <a:srgbClr val="1E293B"/>
+                                </a:solidFill>
+                                <a:latin typeface="Cambria Math" panose="02040503050406030204" pitchFamily="18" charset="0"/>
+                              </a:rPr>
+                              <m:t>&amp;</m:t>
+                            </m:r>
+                            <m:r>
+                              <a:rPr lang="vi-VN" sz="2400" b="0">
+                                <a:solidFill>
+                                  <a:srgbClr val="1E293B"/>
+                                </a:solidFill>
+                                <a:latin typeface="Cambria Math" panose="02040503050406030204" pitchFamily="18" charset="0"/>
+                              </a:rPr>
+                              <m:t>x≥0</m:t>
+                            </m:r>
+                          </m:e>
+                          <m:e>
+                            <m:r>
+                              <a:rPr lang="vi-VN" sz="2400" b="0">
+                                <a:solidFill>
+                                  <a:srgbClr val="1E293B"/>
+                                </a:solidFill>
+                                <a:latin typeface="Cambria Math" panose="02040503050406030204" pitchFamily="18" charset="0"/>
+                              </a:rPr>
+                              <m:t>&amp;</m:t>
+                            </m:r>
+                            <m:r>
+                              <a:rPr lang="vi-VN" sz="2400" b="0">
+                                <a:solidFill>
+                                  <a:srgbClr val="1E293B"/>
+                                </a:solidFill>
+                                <a:latin typeface="Cambria Math" panose="02040503050406030204" pitchFamily="18" charset="0"/>
+                              </a:rPr>
+                              <m:t>y≥0</m:t>
+                            </m:r>
+                          </m:e>
+                          <m:e>
+                            <m:r>
+                              <a:rPr lang="vi-VN" sz="2400" b="0">
+                                <a:solidFill>
+                                  <a:srgbClr val="1E293B"/>
+                                </a:solidFill>
+                                <a:latin typeface="Cambria Math" panose="02040503050406030204" pitchFamily="18" charset="0"/>
+                              </a:rPr>
+                              <m:t>&amp;</m:t>
+                            </m:r>
+                            <m:r>
+                              <a:rPr lang="vi-VN" sz="2400" b="0">
+                                <a:solidFill>
+                                  <a:srgbClr val="1E293B"/>
+                                </a:solidFill>
+                                <a:latin typeface="Cambria Math" panose="02040503050406030204" pitchFamily="18" charset="0"/>
+                              </a:rPr>
+                              <m:t>2x+y≤4</m:t>
+                            </m:r>
+                          </m:e>
+                        </m:eqArr>
+                      </m:e>
+                    </m:d>
+                  </m:oMath>
+                </a14:m>
+              </a:p>
+            </p:txBody>
+          </p:sp>
+        </mc:Choice>
+        <mc:Fallback>
+          <p:sp>
+            <p:nvSpPr>
+              <p:cNvPr id="6" name="TextBox 5"/>
+              <p:cNvSpPr txBox="1"/>
+              <p:nvPr/>
+            </p:nvSpPr>
+            <p:spPr>
+              <a:xfrm>
+                <a:off x="731520" y="1508760"/>
+                <a:ext cx="10789920" cy="2039112"/>
+              </a:xfrm>
+              <a:prstGeom prst="rect">
+                <a:avLst/>
+              </a:prstGeom>
+              <a:noFill/>
+            </p:spPr>
+            <p:txBody>
+              <a:bodyPr wrap="square" anchor="t">
+                <a:spAutoFit/>
+              </a:bodyPr>
+              <a:lstStyle/>
+              <a:p>
+                <a:pPr algn="l" marL="365760" indent="-365760">
+                  <a:spcAft>
+                    <a:spcPts val="1000"/>
+                  </a:spcAft>
+                  <a:buClr>
+                    <a:srgbClr val="1E40AF"/>
+                  </a:buClr>
+                  <a:buFont typeface="Arial"/>
+                  <a:buChar char="•"/>
+                </a:pPr>
+                <a:r>
+                  <a:rPr sz="2400">
+                    <a:solidFill>
+                      <a:srgbClr val="1E293B"/>
+                    </a:solidFill>
+                    <a:latin typeface="Calibri"/>
+                  </a:rPr>
+                  <a:t>2.4. Hệ nào là hệ bậc nhất hai ẩn?</a:t>
+                </a:r>
+              </a:p>
+              <a:p>
+                <a:pPr algn="l" marL="365760" indent="-365760">
+                  <a:spcAft>
+                    <a:spcPts val="1000"/>
+                  </a:spcAft>
+                  <a:buClr>
+                    <a:srgbClr val="1E40AF"/>
+                  </a:buClr>
+                  <a:buFont typeface="Arial"/>
+                  <a:buChar char="•"/>
+                </a:pPr>
+                <a:r>
+                  <a:rPr sz="2400">
+                    <a:solidFill>
+                      <a:srgbClr val="1E293B"/>
+                    </a:solidFill>
+                    <a:latin typeface="Calibri"/>
+                  </a:rPr>
+                  <a:t>2.5b) Miền nghiệm: </a:t>
+                </a:r>
+                <a:r>
+                  <a:rPr lang="vi-VN"/>
+                  <a:t>\begin{cases}x\ge 0\\y\ge 0\\2x+y\le 4\end{cases}</a:t>
+                </a:r>
+              </a:p>
+            </p:txBody>
+          </p:sp>
+        </mc:Fallback>
+      </mc:AlternateContent>
+      <p:sp>
+        <p:nvSpPr>
+          <p:cNvPr id="7" name="Rounded Rectangle 6"/>
+          <p:cNvSpPr/>
+          <p:nvPr/>
+        </p:nvSpPr>
+        <p:spPr>
+          <a:xfrm>
+            <a:off x="10701223" y="457200"/>
+            <a:ext cx="941832" cy="457200"/>
+          </a:xfrm>
+          <a:prstGeom prst="roundRect">
+            <a:avLst/>
+          </a:prstGeom>
+          <a:solidFill>
+            <a:srgbClr val="1E40AF"/>
+          </a:solidFill>
+          <a:ln>
+            <a:noFill/>
+          </a:ln>
+          <a:effectLst/>
+        </p:spPr>
+        <p:style>
+          <a:lnRef idx="1">
+            <a:schemeClr val="accent1"/>
+          </a:lnRef>
+          <a:fillRef idx="3">
+            <a:schemeClr val="accent1"/>
+          </a:fillRef>
+          <a:effectRef idx="2">
+            <a:schemeClr val="accent1"/>
+          </a:effectRef>
+          <a:fontRef idx="minor">
+            <a:schemeClr val="lt1"/>
+          </a:fontRef>
+        </p:style>
+        <p:txBody>
+          <a:bodyPr rtlCol="0" anchor="ctr" tIns="0" bIns="0"/>
+          <a:lstStyle/>
+          <a:p>
+            <a:pPr algn="ctr"/>
+            <a:r>
+              <a:rPr sz="1400" b="1">
+                <a:solidFill>
+                  <a:srgbClr val="FFFFFF"/>
+                </a:solidFill>
+                <a:latin typeface="Arial"/>
+              </a:rPr>
+              <a:t>ĐỀ BÀI</a:t>
+            </a:r>
+          </a:p>
+        </p:txBody>
+      </p:sp>
+    </p:spTree>
+  </p:cSld>
+  <p:clrMapOvr>
+    <a:masterClrMapping/>
+  </p:clrMapOvr>
+</p:sld>
+</file>
+
+<file path=ppt/slides/slide16.xml><?xml version="1.0" encoding="utf-8"?>
+<p:sld xmlns:a="http://schemas.openxmlformats.org/drawingml/2006/main" xmlns:p="http://schemas.openxmlformats.org/presentationml/2006/main" xmlns:r="http://schemas.openxmlformats.org/officeDocument/2006/relationships">
+  <p:cSld>
+    <p:bg>
+      <p:bgPr>
+        <a:solidFill>
+          <a:srgbClr val="FFFFFF"/>
+        </a:solidFill>
+        <a:effectLst/>
+      </p:bgPr>
+    </p:bg>
+    <p:spTree>
+      <p:nvGrpSpPr>
+        <p:cNvPr id="1" name=""/>
+        <p:cNvGrpSpPr/>
+        <p:nvPr/>
+      </p:nvGrpSpPr>
+      <p:grpSpPr/>
+      <p:sp>
+        <p:nvSpPr>
+          <p:cNvPr id="2" name="Rectangle 1"/>
+          <p:cNvSpPr/>
+          <p:nvPr/>
+        </p:nvSpPr>
+        <p:spPr>
+          <a:xfrm>
+            <a:off x="457200" y="384048"/>
+            <a:ext cx="109728" cy="658368"/>
+          </a:xfrm>
+          <a:prstGeom prst="rect">
+            <a:avLst/>
+          </a:prstGeom>
+          <a:solidFill>
+            <a:srgbClr val="1E40AF"/>
+          </a:solidFill>
+          <a:ln>
+            <a:noFill/>
+          </a:ln>
+          <a:effectLst/>
+        </p:spPr>
+        <p:style>
+          <a:lnRef idx="1">
+            <a:schemeClr val="accent1"/>
+          </a:lnRef>
+          <a:fillRef idx="3">
+            <a:schemeClr val="accent1"/>
+          </a:fillRef>
+          <a:effectRef idx="2">
+            <a:schemeClr val="accent1"/>
+          </a:effectRef>
+          <a:fontRef idx="minor">
+            <a:schemeClr val="lt1"/>
+          </a:fontRef>
+        </p:style>
+        <p:txBody>
+          <a:bodyPr rtlCol="0" anchor="ctr"/>
+          <a:lstStyle/>
+          <a:p>
+            <a:pPr algn="ctr"/>
+          </a:p>
+        </p:txBody>
+      </p:sp>
+      <p:sp>
+        <p:nvSpPr>
+          <p:cNvPr id="3" name="TextBox 2"/>
+          <p:cNvSpPr txBox="1"/>
+          <p:nvPr/>
+        </p:nvSpPr>
+        <p:spPr>
+          <a:xfrm>
+            <a:off x="731520" y="274320"/>
+            <a:ext cx="9610344" cy="868680"/>
+          </a:xfrm>
+          <a:prstGeom prst="rect">
+            <a:avLst/>
+          </a:prstGeom>
+          <a:noFill/>
+        </p:spPr>
+        <p:txBody>
+          <a:bodyPr wrap="none" anchor="ctr">
+            <a:spAutoFit/>
+          </a:bodyPr>
+          <a:lstStyle/>
+          <a:p>
+            <a:r>
+              <a:rPr sz="3600" b="1">
+                <a:solidFill>
+                  <a:srgbClr val="1E40AF"/>
+                </a:solidFill>
+                <a:latin typeface="Arial"/>
+              </a:rPr>
+              <a:t>LUYỆN TẬP 2.4 – 2.5</a:t>
+            </a:r>
+          </a:p>
+        </p:txBody>
+      </p:sp>
+      <p:sp>
+        <p:nvSpPr>
+          <p:cNvPr id="4" name="Rectangle 3"/>
+          <p:cNvSpPr/>
+          <p:nvPr/>
+        </p:nvSpPr>
+        <p:spPr>
+          <a:xfrm>
+            <a:off x="457200" y="1207008"/>
+            <a:ext cx="11274552" cy="22000"/>
+          </a:xfrm>
+          <a:prstGeom prst="rect">
+            <a:avLst/>
+          </a:prstGeom>
+          <a:solidFill>
+            <a:srgbClr val="E2E8F0"/>
+          </a:solidFill>
+          <a:ln>
+            <a:noFill/>
+          </a:ln>
+          <a:effectLst/>
+        </p:spPr>
+        <p:style>
+          <a:lnRef idx="1">
+            <a:schemeClr val="accent1"/>
+          </a:lnRef>
+          <a:fillRef idx="3">
+            <a:schemeClr val="accent1"/>
+          </a:fillRef>
+          <a:effectRef idx="2">
+            <a:schemeClr val="accent1"/>
+          </a:effectRef>
+          <a:fontRef idx="minor">
+            <a:schemeClr val="lt1"/>
+          </a:fontRef>
+        </p:style>
+        <p:txBody>
+          <a:bodyPr rtlCol="0" anchor="ctr"/>
+          <a:lstStyle/>
+          <a:p>
+            <a:pPr algn="ctr"/>
+          </a:p>
+        </p:txBody>
+      </p:sp>
+      <p:sp>
+        <p:nvSpPr>
+          <p:cNvPr id="5" name="TextBox 4"/>
+          <p:cNvSpPr txBox="1"/>
+          <p:nvPr/>
+        </p:nvSpPr>
+        <p:spPr>
+          <a:xfrm>
+            <a:off x="457200" y="6355080"/>
+            <a:ext cx="11274552" cy="365760"/>
+          </a:xfrm>
+          <a:prstGeom prst="rect">
+            <a:avLst/>
+          </a:prstGeom>
+          <a:noFill/>
+        </p:spPr>
+        <p:txBody>
+          <a:bodyPr wrap="none">
+            <a:spAutoFit/>
+          </a:bodyPr>
+          <a:lstStyle/>
+          <a:p>
+            <a:pPr algn="r"/>
+            <a:r>
+              <a:rPr sz="1200">
+                <a:solidFill>
+                  <a:srgbClr val="64748B"/>
+                </a:solidFill>
+                <a:latin typeface="Calibri"/>
+              </a:rPr>
+              <a:t>Toán 10 · Bài 4. Hệ bất phương trình bậc nhất hai ẩn (STEM)          16</a:t>
+            </a:r>
+          </a:p>
+        </p:txBody>
+      </p:sp>
+      <mc:AlternateContent xmlns:mc="http://schemas.openxmlformats.org/markup-compatibility/2006">
+        <mc:Choice xmlns:a14="http://schemas.microsoft.com/office/drawing/2010/main" Requires="a14">
+          <p:sp>
+            <p:nvSpPr>
+              <p:cNvPr id="6" name="TextBox 5"/>
+              <p:cNvSpPr txBox="1"/>
+              <p:nvPr/>
+            </p:nvSpPr>
+            <p:spPr>
+              <a:xfrm>
+                <a:off x="731520" y="1508760"/>
+                <a:ext cx="10789920" cy="2039112"/>
+              </a:xfrm>
+              <a:prstGeom prst="rect">
+                <a:avLst/>
+              </a:prstGeom>
+              <a:noFill/>
+            </p:spPr>
+            <p:txBody>
+              <a:bodyPr wrap="square" anchor="t">
+                <a:spAutoFit/>
+              </a:bodyPr>
+              <a:lstStyle/>
+              <a:p>
+                <a:pPr algn="l">
+                  <a:spcAft>
+                    <a:spcPts val="1000"/>
+                  </a:spcAft>
+                </a:pPr>
+                <a:r>
+                  <a:rPr sz="2400" b="1">
+                    <a:solidFill>
+                      <a:srgbClr val="1E40AF"/>
+                    </a:solidFill>
+                    <a:latin typeface="Calibri"/>
+                  </a:rPr>
+                  <a:t>2.4. Hệ bậc nhất hai ẩn: a) và d)</a:t>
+                </a:r>
+              </a:p>
+              <a:p>
+                <a:pPr algn="l" marL="365760" indent="-365760">
+                  <a:spcAft>
+                    <a:spcPts val="1000"/>
+                  </a:spcAft>
+                  <a:buClr>
+                    <a:srgbClr val="1E40AF"/>
+                  </a:buClr>
+                  <a:buFont typeface="Arial"/>
+                  <a:buChar char="•"/>
+                </a:pPr>
+                <a:r>
+                  <a:rPr sz="2400">
+                    <a:solidFill>
+                      <a:srgbClr val="1E293B"/>
+                    </a:solidFill>
+                    <a:latin typeface="Calibri"/>
+                  </a:rPr>
+                  <a:t>2.5b) </a:t>
+                </a:r>
+                <a14:m>
+                  <m:oMath xmlns:m="http://schemas.openxmlformats.org/officeDocument/2006/math">
+                    <m:d>
+                      <m:dPr>
+                        <m:begChr m:val="{"/>
+                        <m:sepChr m:val=""/>
+                        <m:endChr m:val=""/>
+                      </m:dPr>
+                      <m:e>
+                        <m:eqArr>
+                          <m:e>
+                            <m:r>
+                              <a:rPr lang="vi-VN" sz="2400" b="0">
+                                <a:solidFill>
+                                  <a:srgbClr val="1E293B"/>
+                                </a:solidFill>
+                                <a:latin typeface="Cambria Math" panose="02040503050406030204" pitchFamily="18" charset="0"/>
+                              </a:rPr>
+                              <m:t>&amp;</m:t>
+                            </m:r>
+                            <m:r>
+                              <a:rPr lang="vi-VN" sz="2400" b="0">
+                                <a:solidFill>
+                                  <a:srgbClr val="1E293B"/>
+                                </a:solidFill>
+                                <a:latin typeface="Cambria Math" panose="02040503050406030204" pitchFamily="18" charset="0"/>
+                              </a:rPr>
+                              <m:t>x≥0</m:t>
+                            </m:r>
+                          </m:e>
+                          <m:e>
+                            <m:r>
+                              <a:rPr lang="vi-VN" sz="2400" b="0">
+                                <a:solidFill>
+                                  <a:srgbClr val="1E293B"/>
+                                </a:solidFill>
+                                <a:latin typeface="Cambria Math" panose="02040503050406030204" pitchFamily="18" charset="0"/>
+                              </a:rPr>
+                              <m:t>&amp;</m:t>
+                            </m:r>
+                            <m:r>
+                              <a:rPr lang="vi-VN" sz="2400" b="0">
+                                <a:solidFill>
+                                  <a:srgbClr val="1E293B"/>
+                                </a:solidFill>
+                                <a:latin typeface="Cambria Math" panose="02040503050406030204" pitchFamily="18" charset="0"/>
+                              </a:rPr>
+                              <m:t>y≥0</m:t>
+                            </m:r>
+                          </m:e>
+                          <m:e>
+                            <m:r>
+                              <a:rPr lang="vi-VN" sz="2400" b="0">
+                                <a:solidFill>
+                                  <a:srgbClr val="1E293B"/>
+                                </a:solidFill>
+                                <a:latin typeface="Cambria Math" panose="02040503050406030204" pitchFamily="18" charset="0"/>
+                              </a:rPr>
+                              <m:t>&amp;</m:t>
+                            </m:r>
+                            <m:r>
+                              <a:rPr lang="vi-VN" sz="2400" b="0">
+                                <a:solidFill>
+                                  <a:srgbClr val="1E293B"/>
+                                </a:solidFill>
+                                <a:latin typeface="Cambria Math" panose="02040503050406030204" pitchFamily="18" charset="0"/>
+                              </a:rPr>
+                              <m:t>2x+y≤4</m:t>
+                            </m:r>
+                          </m:e>
+                        </m:eqArr>
+                      </m:e>
+                    </m:d>
+                  </m:oMath>
+                </a14:m>
+                <a:r>
+                  <a:rPr sz="2400">
+                    <a:solidFill>
+                      <a:srgbClr val="1E293B"/>
+                    </a:solidFill>
+                    <a:latin typeface="Calibri"/>
+                  </a:rPr>
+                  <a:t>  tam giác O(0; 0), A(0; 4), B(2; 0)</a:t>
+                </a:r>
+              </a:p>
+            </p:txBody>
+          </p:sp>
+        </mc:Choice>
+        <mc:Fallback>
+          <p:sp>
+            <p:nvSpPr>
+              <p:cNvPr id="6" name="TextBox 5"/>
+              <p:cNvSpPr txBox="1"/>
+              <p:nvPr/>
+            </p:nvSpPr>
+            <p:spPr>
+              <a:xfrm>
+                <a:off x="731520" y="1508760"/>
+                <a:ext cx="10789920" cy="2039112"/>
+              </a:xfrm>
+              <a:prstGeom prst="rect">
+                <a:avLst/>
+              </a:prstGeom>
+              <a:noFill/>
+            </p:spPr>
+            <p:txBody>
+              <a:bodyPr wrap="square" anchor="t">
+                <a:spAutoFit/>
+              </a:bodyPr>
+              <a:lstStyle/>
+              <a:p>
+                <a:pPr algn="l">
+                  <a:spcAft>
+                    <a:spcPts val="1000"/>
+                  </a:spcAft>
+                </a:pPr>
+                <a:r>
+                  <a:rPr sz="2400" b="1">
+                    <a:solidFill>
+                      <a:srgbClr val="1E40AF"/>
+                    </a:solidFill>
+                    <a:latin typeface="Calibri"/>
+                  </a:rPr>
+                  <a:t>2.4. Hệ bậc nhất hai ẩn: a) và d)</a:t>
+                </a:r>
+              </a:p>
+              <a:p>
+                <a:pPr algn="l" marL="365760" indent="-365760">
+                  <a:spcAft>
+                    <a:spcPts val="1000"/>
+                  </a:spcAft>
+                  <a:buClr>
+                    <a:srgbClr val="1E40AF"/>
+                  </a:buClr>
+                  <a:buFont typeface="Arial"/>
+                  <a:buChar char="•"/>
+                </a:pPr>
+                <a:r>
+                  <a:rPr sz="2400">
+                    <a:solidFill>
+                      <a:srgbClr val="1E293B"/>
+                    </a:solidFill>
+                    <a:latin typeface="Calibri"/>
+                  </a:rPr>
+                  <a:t>2.5b) </a:t>
+                </a:r>
+                <a:r>
+                  <a:rPr lang="vi-VN"/>
+                  <a:t>\begin{cases}x\ge 0\\y\ge 0\\2x+y\le 4\end{cases}</a:t>
+                </a:r>
+                <a:r>
+                  <a:rPr sz="2400">
+                    <a:solidFill>
+                      <a:srgbClr val="1E293B"/>
+                    </a:solidFill>
+                    <a:latin typeface="Calibri"/>
+                  </a:rPr>
+                  <a:t>  tam giác O(0; 0), A(0; 4), B(2; 0)</a:t>
+                </a:r>
+              </a:p>
+            </p:txBody>
+          </p:sp>
+        </mc:Fallback>
+      </mc:AlternateContent>
+      <p:sp>
+        <p:nvSpPr>
+          <p:cNvPr id="7" name="Rounded Rectangle 6"/>
+          <p:cNvSpPr/>
+          <p:nvPr/>
+        </p:nvSpPr>
+        <p:spPr>
+          <a:xfrm>
+            <a:off x="731520" y="3685032"/>
+            <a:ext cx="8686800" cy="685800"/>
+          </a:xfrm>
+          <a:prstGeom prst="roundRect">
+            <a:avLst>
+              <a:gd name="adj" fmla="val 8000"/>
+            </a:avLst>
+          </a:prstGeom>
+          <a:solidFill>
+            <a:srgbClr val="FEF2F2"/>
+          </a:solidFill>
+          <a:ln w="19050">
+            <a:solidFill>
+              <a:srgbClr val="991B1B"/>
+            </a:solidFill>
+          </a:ln>
+          <a:effectLst/>
+        </p:spPr>
+        <p:style>
+          <a:lnRef idx="1">
+            <a:schemeClr val="accent1"/>
+          </a:lnRef>
+          <a:fillRef idx="3">
+            <a:schemeClr val="accent1"/>
+          </a:fillRef>
+          <a:effectRef idx="2">
+            <a:schemeClr val="accent1"/>
+          </a:effectRef>
+          <a:fontRef idx="minor">
+            <a:schemeClr val="lt1"/>
+          </a:fontRef>
+        </p:style>
+        <p:txBody>
+          <a:bodyPr rtlCol="0" anchor="ctr"/>
+          <a:lstStyle/>
+          <a:p>
+            <a:pPr algn="ctr"/>
+          </a:p>
+        </p:txBody>
+      </p:sp>
+      <p:sp>
+        <p:nvSpPr>
+          <p:cNvPr id="8" name="TextBox 7"/>
+          <p:cNvSpPr txBox="1"/>
+          <p:nvPr/>
+        </p:nvSpPr>
+        <p:spPr>
+          <a:xfrm>
+            <a:off x="914400" y="3685032"/>
+            <a:ext cx="8321040" cy="685800"/>
+          </a:xfrm>
+          <a:prstGeom prst="rect">
+            <a:avLst/>
+          </a:prstGeom>
+          <a:noFill/>
+        </p:spPr>
+        <p:txBody>
+          <a:bodyPr wrap="square" anchor="ctr">
+            <a:spAutoFit/>
+          </a:bodyPr>
+          <a:lstStyle/>
+          <a:p>
+            <a:pPr algn="l">
+              <a:spcAft>
+                <a:spcPts val="400"/>
+              </a:spcAft>
+            </a:pPr>
+            <a:r>
+              <a:rPr sz="2400" b="1">
+                <a:solidFill>
+                  <a:srgbClr val="991B1B"/>
+                </a:solidFill>
+                <a:latin typeface="Calibri"/>
+              </a:rPr>
+              <a:t>Kể cả các cạnh (dấu ≤, ≥)</a:t>
+            </a:r>
+          </a:p>
+        </p:txBody>
+      </p:sp>
+      <p:sp>
+        <p:nvSpPr>
+          <p:cNvPr id="9" name="Rounded Rectangle 8"/>
+          <p:cNvSpPr/>
+          <p:nvPr/>
+        </p:nvSpPr>
+        <p:spPr>
+          <a:xfrm>
+            <a:off x="10463479" y="457200"/>
+            <a:ext cx="1179576" cy="457200"/>
+          </a:xfrm>
+          <a:prstGeom prst="roundRect">
+            <a:avLst/>
+          </a:prstGeom>
+          <a:solidFill>
+            <a:srgbClr val="166534"/>
+          </a:solidFill>
+          <a:ln>
+            <a:noFill/>
+          </a:ln>
+          <a:effectLst/>
+        </p:spPr>
+        <p:style>
+          <a:lnRef idx="1">
+            <a:schemeClr val="accent1"/>
+          </a:lnRef>
+          <a:fillRef idx="3">
+            <a:schemeClr val="accent1"/>
+          </a:fillRef>
+          <a:effectRef idx="2">
+            <a:schemeClr val="accent1"/>
+          </a:effectRef>
+          <a:fontRef idx="minor">
+            <a:schemeClr val="lt1"/>
+          </a:fontRef>
+        </p:style>
+        <p:txBody>
+          <a:bodyPr rtlCol="0" anchor="ctr" tIns="0" bIns="0"/>
+          <a:lstStyle/>
+          <a:p>
+            <a:pPr algn="ctr"/>
+            <a:r>
+              <a:rPr sz="1400" b="1">
+                <a:solidFill>
+                  <a:srgbClr val="FFFFFF"/>
+                </a:solidFill>
+                <a:latin typeface="Arial"/>
+              </a:rPr>
+              <a:t>LỜI GIẢI</a:t>
+            </a:r>
+          </a:p>
+        </p:txBody>
+      </p:sp>
+    </p:spTree>
+  </p:cSld>
+  <p:clrMapOvr>
+    <a:masterClrMapping/>
+  </p:clrMapOvr>
+</p:sld>
+</file>
+
+<file path=ppt/slides/slide17.xml><?xml version="1.0" encoding="utf-8"?>
+<p:sld xmlns:a="http://schemas.openxmlformats.org/drawingml/2006/main" xmlns:p="http://schemas.openxmlformats.org/presentationml/2006/main" xmlns:r="http://schemas.openxmlformats.org/officeDocument/2006/relationships">
+  <p:cSld>
+    <p:bg>
+      <p:bgPr>
+        <a:solidFill>
+          <a:srgbClr val="FFFFFF"/>
+        </a:solidFill>
+        <a:effectLst/>
+      </p:bgPr>
+    </p:bg>
+    <p:spTree>
+      <p:nvGrpSpPr>
+        <p:cNvPr id="1" name=""/>
+        <p:cNvGrpSpPr/>
+        <p:nvPr/>
+      </p:nvGrpSpPr>
+      <p:grpSpPr/>
+      <p:sp>
+        <p:nvSpPr>
+          <p:cNvPr id="2" name="Rectangle 1"/>
+          <p:cNvSpPr/>
+          <p:nvPr/>
+        </p:nvSpPr>
+        <p:spPr>
+          <a:xfrm>
+            <a:off x="457200" y="384048"/>
+            <a:ext cx="109728" cy="658368"/>
+          </a:xfrm>
+          <a:prstGeom prst="rect">
+            <a:avLst/>
+          </a:prstGeom>
+          <a:solidFill>
+            <a:srgbClr val="1E40AF"/>
+          </a:solidFill>
+          <a:ln>
+            <a:noFill/>
+          </a:ln>
+          <a:effectLst/>
+        </p:spPr>
+        <p:style>
+          <a:lnRef idx="1">
+            <a:schemeClr val="accent1"/>
+          </a:lnRef>
+          <a:fillRef idx="3">
+            <a:schemeClr val="accent1"/>
+          </a:fillRef>
+          <a:effectRef idx="2">
+            <a:schemeClr val="accent1"/>
+          </a:effectRef>
+          <a:fontRef idx="minor">
+            <a:schemeClr val="lt1"/>
+          </a:fontRef>
+        </p:style>
+        <p:txBody>
+          <a:bodyPr rtlCol="0" anchor="ctr"/>
+          <a:lstStyle/>
+          <a:p>
+            <a:pPr algn="ctr"/>
+          </a:p>
+        </p:txBody>
+      </p:sp>
+      <p:sp>
+        <p:nvSpPr>
+          <p:cNvPr id="3" name="TextBox 2"/>
+          <p:cNvSpPr txBox="1"/>
+          <p:nvPr/>
+        </p:nvSpPr>
+        <p:spPr>
+          <a:xfrm>
+            <a:off x="731520" y="274320"/>
+            <a:ext cx="10972800" cy="868680"/>
+          </a:xfrm>
+          <a:prstGeom prst="rect">
+            <a:avLst/>
+          </a:prstGeom>
+          <a:noFill/>
+        </p:spPr>
+        <p:txBody>
+          <a:bodyPr wrap="none" anchor="ctr">
+            <a:spAutoFit/>
+          </a:bodyPr>
+          <a:lstStyle/>
+          <a:p>
+            <a:r>
+              <a:rPr sz="3600" b="1">
+                <a:solidFill>
+                  <a:srgbClr val="1E40AF"/>
+                </a:solidFill>
+                <a:latin typeface="Arial"/>
+              </a:rPr>
+              <a:t>NHIỆM VỤ VỀ NHÀ</a:t>
+            </a:r>
+          </a:p>
+        </p:txBody>
+      </p:sp>
+      <p:sp>
+        <p:nvSpPr>
+          <p:cNvPr id="4" name="Rectangle 3"/>
+          <p:cNvSpPr/>
+          <p:nvPr/>
+        </p:nvSpPr>
+        <p:spPr>
+          <a:xfrm>
+            <a:off x="457200" y="1207008"/>
+            <a:ext cx="11274552" cy="22000"/>
+          </a:xfrm>
+          <a:prstGeom prst="rect">
+            <a:avLst/>
+          </a:prstGeom>
+          <a:solidFill>
+            <a:srgbClr val="E2E8F0"/>
+          </a:solidFill>
+          <a:ln>
+            <a:noFill/>
+          </a:ln>
+          <a:effectLst/>
+        </p:spPr>
+        <p:style>
+          <a:lnRef idx="1">
+            <a:schemeClr val="accent1"/>
+          </a:lnRef>
+          <a:fillRef idx="3">
+            <a:schemeClr val="accent1"/>
+          </a:fillRef>
+          <a:effectRef idx="2">
+            <a:schemeClr val="accent1"/>
+          </a:effectRef>
+          <a:fontRef idx="minor">
+            <a:schemeClr val="lt1"/>
+          </a:fontRef>
+        </p:style>
+        <p:txBody>
+          <a:bodyPr rtlCol="0" anchor="ctr"/>
+          <a:lstStyle/>
+          <a:p>
+            <a:pPr algn="ctr"/>
+          </a:p>
+        </p:txBody>
+      </p:sp>
+      <p:sp>
+        <p:nvSpPr>
+          <p:cNvPr id="5" name="TextBox 4"/>
+          <p:cNvSpPr txBox="1"/>
+          <p:nvPr/>
+        </p:nvSpPr>
+        <p:spPr>
+          <a:xfrm>
+            <a:off x="457200" y="6355080"/>
+            <a:ext cx="11274552" cy="365760"/>
+          </a:xfrm>
+          <a:prstGeom prst="rect">
+            <a:avLst/>
+          </a:prstGeom>
+          <a:noFill/>
+        </p:spPr>
+        <p:txBody>
+          <a:bodyPr wrap="none">
+            <a:spAutoFit/>
+          </a:bodyPr>
+          <a:lstStyle/>
+          <a:p>
+            <a:pPr algn="r"/>
+            <a:r>
+              <a:rPr sz="1200">
+                <a:solidFill>
+                  <a:srgbClr val="64748B"/>
+                </a:solidFill>
+                <a:latin typeface="Calibri"/>
+              </a:rPr>
+              <a:t>Toán 10 · Bài 4. Hệ bất phương trình bậc nhất hai ẩn (STEM)          17</a:t>
+            </a:r>
+          </a:p>
+        </p:txBody>
+      </p:sp>
+      <p:sp>
+        <p:nvSpPr>
+          <p:cNvPr id="6" name="TextBox 5"/>
+          <p:cNvSpPr txBox="1"/>
+          <p:nvPr/>
+        </p:nvSpPr>
+        <p:spPr>
+          <a:xfrm>
+            <a:off x="731520" y="1508760"/>
+            <a:ext cx="10789920" cy="2267712"/>
+          </a:xfrm>
+          <a:prstGeom prst="rect">
+            <a:avLst/>
+          </a:prstGeom>
+          <a:noFill/>
+        </p:spPr>
+        <p:txBody>
+          <a:bodyPr wrap="square" anchor="t">
+            <a:spAutoFit/>
+          </a:bodyPr>
+          <a:lstStyle/>
+          <a:p>
+            <a:pPr algn="l" marL="365760" indent="-365760">
+              <a:spcAft>
+                <a:spcPts val="1000"/>
+              </a:spcAft>
+              <a:buClr>
+                <a:srgbClr val="1E40AF"/>
+              </a:buClr>
+              <a:buFont typeface="Arial"/>
+              <a:buChar char="•"/>
+            </a:pPr>
+            <a:r>
+              <a:rPr sz="2400">
+                <a:solidFill>
+                  <a:srgbClr val="1E293B"/>
+                </a:solidFill>
+                <a:latin typeface="Calibri"/>
+              </a:rPr>
+              <a:t>Bài tập 2.6: thịt bò, thịt lợn</a:t>
+            </a:r>
+          </a:p>
+          <a:p>
+            <a:pPr algn="l" marL="365760" indent="-365760">
+              <a:spcAft>
+                <a:spcPts val="1000"/>
+              </a:spcAft>
+              <a:buClr>
+                <a:srgbClr val="1E40AF"/>
+              </a:buClr>
+              <a:buFont typeface="Arial"/>
+              <a:buChar char="•"/>
+            </a:pPr>
+            <a:r>
+              <a:rPr sz="2400">
+                <a:solidFill>
+                  <a:srgbClr val="1E293B"/>
+                </a:solidFill>
+                <a:latin typeface="Calibri"/>
+              </a:rPr>
+              <a:t>Hoàn thiện sản phẩm theo góp ý</a:t>
+            </a:r>
+          </a:p>
+          <a:p>
+            <a:pPr algn="l" marL="365760" indent="-365760">
+              <a:spcAft>
+                <a:spcPts val="1000"/>
+              </a:spcAft>
+              <a:buClr>
+                <a:srgbClr val="1E40AF"/>
+              </a:buClr>
+              <a:buFont typeface="Arial"/>
+              <a:buChar char="•"/>
+            </a:pPr>
+            <a:r>
+              <a:rPr sz="2400">
+                <a:solidFill>
+                  <a:srgbClr val="1E293B"/>
+                </a:solidFill>
+                <a:latin typeface="Calibri"/>
+              </a:rPr>
+              <a:t>Nộp bản hoàn chỉnh lên Classroom</a:t>
+            </a:r>
+          </a:p>
+          <a:p>
+            <a:pPr algn="l" marL="365760" indent="-365760">
+              <a:spcAft>
+                <a:spcPts val="1000"/>
+              </a:spcAft>
+              <a:buClr>
+                <a:srgbClr val="1E40AF"/>
+              </a:buClr>
+              <a:buFont typeface="Arial"/>
+              <a:buChar char="•"/>
+            </a:pPr>
+            <a:r>
+              <a:rPr sz="2400">
+                <a:solidFill>
+                  <a:srgbClr val="1E293B"/>
+                </a:solidFill>
+                <a:latin typeface="Calibri"/>
+              </a:rPr>
+              <a:t>Chuẩn bị: Bài tập cuối chương II</a:t>
+            </a:r>
+          </a:p>
+        </p:txBody>
+      </p:sp>
     </p:spTree>
   </p:cSld>
   <p:clrMapOvr>
@@ -7066,7 +7335,7 @@
                 </a:solidFill>
                 <a:latin typeface="Arial"/>
               </a:rPr>
-              <a:t>TRẠM KIỂM CHỨNG AI – LỜI GIẢI</a:t>
+              <a:t>BÀI TẬP CỦA BẠN</a:t>
             </a:r>
           </a:p>
         </p:txBody>
@@ -7145,21 +7414,91 @@
                 </a:solidFill>
                 <a:latin typeface="Calibri"/>
               </a:rPr>
-              <a:t>Toán 10 · Bài 4. Hệ bất phương trình bậc nhất hai ẩn (STEM)          11</a:t>
-            </a:r>
-          </a:p>
-        </p:txBody>
-      </p:sp>
-      <p:sp>
-        <p:nvSpPr>
-          <p:cNvPr id="6" name="TextBox 5"/>
+              <a:t>Toán 10 · Bài 4. Hệ bất phương trình bậc nhất hai ẩn (STEM)          18</a:t>
+            </a:r>
+          </a:p>
+        </p:txBody>
+      </p:sp>
+      <p:sp>
+        <p:nvSpPr>
+          <p:cNvPr id="6" name="Rectangle 5"/>
+          <p:cNvSpPr/>
+          <p:nvPr/>
+        </p:nvSpPr>
+        <p:spPr>
+          <a:xfrm>
+            <a:off x="731520" y="1463040"/>
+            <a:ext cx="4572000" cy="4572000"/>
+          </a:xfrm>
+          <a:prstGeom prst="rect">
+            <a:avLst/>
+          </a:prstGeom>
+          <a:solidFill>
+            <a:srgbClr val="F8FAFC"/>
+          </a:solidFill>
+          <a:ln w="19050">
+            <a:solidFill>
+              <a:srgbClr val="E2E8F0"/>
+            </a:solidFill>
+          </a:ln>
+          <a:effectLst/>
+        </p:spPr>
+        <p:style>
+          <a:lnRef idx="1">
+            <a:schemeClr val="accent1"/>
+          </a:lnRef>
+          <a:fillRef idx="3">
+            <a:schemeClr val="accent1"/>
+          </a:fillRef>
+          <a:effectRef idx="2">
+            <a:schemeClr val="accent1"/>
+          </a:effectRef>
+          <a:fontRef idx="minor">
+            <a:schemeClr val="lt1"/>
+          </a:fontRef>
+        </p:style>
+        <p:txBody>
+          <a:bodyPr rtlCol="0" anchor="ctr"/>
+          <a:lstStyle/>
+          <a:p>
+            <a:pPr algn="ctr"/>
+          </a:p>
+        </p:txBody>
+      </p:sp>
+      <p:pic>
+        <p:nvPicPr>
+          <p:cNvPr id="7" name="Picture 6" descr="QR_CungCo_Bai4_Toan10.png"/>
+          <p:cNvPicPr>
+            <a:picLocks noChangeAspect="1"/>
+          </p:cNvPicPr>
+          <p:nvPr/>
+        </p:nvPicPr>
+        <p:blipFill>
+          <a:blip r:embed="rId2"/>
+          <a:stretch>
+            <a:fillRect/>
+          </a:stretch>
+        </p:blipFill>
+        <p:spPr>
+          <a:xfrm>
+            <a:off x="960120" y="1691640"/>
+            <a:ext cx="4114800" cy="4114800"/>
+          </a:xfrm>
+          <a:prstGeom prst="rect">
+            <a:avLst/>
+          </a:prstGeom>
+        </p:spPr>
+      </p:pic>
+      <p:sp>
+        <p:nvSpPr>
+          <p:cNvPr id="8" name="TextBox 7"/>
           <p:cNvSpPr txBox="1"/>
           <p:nvPr/>
         </p:nvSpPr>
         <p:spPr>
           <a:xfrm>
-            <a:off x="731520" y="1508760"/>
-            <a:ext cx="10789920" cy="1700784"/>
+            <a:off x="5760720" y="1554480"/>
+            <a:ext cx="6035040" cy="3108960"/>
           </a:xfrm>
           <a:prstGeom prst="rect">
             <a:avLst/>
@@ -7171,22 +7510,6 @@
             <a:spAutoFit/>
           </a:bodyPr>
           <a:lstStyle/>
-          <a:p>
-            <a:pPr algn="l">
-              <a:spcAft>
-                <a:spcPts val="1000"/>
-              </a:spcAft>
-            </a:pPr>
-            <a:r>
-              <a:rPr sz="2400" b="1">
-                <a:solidFill>
-                  <a:srgbClr val="1E40AF"/>
-                </a:solidFill>
-                <a:latin typeface="Calibri"/>
-              </a:rPr>
-              <a:t>AI: 100 g thịt + 200 g đậu phụ rẻ nhất</a:t>
-            </a:r>
-          </a:p>
           <a:p>
             <a:pPr algn="l" marL="365760" indent="-365760">
               <a:spcAft>
@@ -7199,13 +7522,13 @@
               <a:buChar char="•"/>
             </a:pPr>
             <a:r>
-              <a:rPr sz="2400">
+              <a:rPr sz="2600">
                 <a:solidFill>
                   <a:srgbClr val="1E293B"/>
                 </a:solidFill>
                 <a:latin typeface="Calibri"/>
               </a:rPr>
-              <a:t>(1; 2) thuộc miền nghiệm (đỉnh B)</a:t>
+              <a:t>Quét mã QR bằng điện thoại</a:t>
             </a:r>
           </a:p>
           <a:p>
@@ -7220,75 +7543,69 @@
               <a:buChar char="•"/>
             </a:pPr>
             <a:r>
-              <a:rPr sz="2400">
+              <a:rPr sz="2600">
                 <a:solidFill>
                   <a:srgbClr val="1E293B"/>
                 </a:solidFill>
                 <a:latin typeface="Calibri"/>
               </a:rPr>
-              <a:t>Chi phí 21 nghìn &gt; 13,5 nghìn</a:t>
-            </a:r>
-          </a:p>
-        </p:txBody>
-      </p:sp>
-      <p:sp>
-        <p:nvSpPr>
-          <p:cNvPr id="7" name="Rounded Rectangle 6"/>
-          <p:cNvSpPr/>
-          <p:nvPr/>
-        </p:nvSpPr>
-        <p:spPr>
-          <a:xfrm>
-            <a:off x="731520" y="3346704"/>
-            <a:ext cx="8686800" cy="685800"/>
-          </a:xfrm>
-          <a:prstGeom prst="roundRect">
-            <a:avLst>
-              <a:gd name="adj" fmla="val 8000"/>
-            </a:avLst>
-          </a:prstGeom>
-          <a:solidFill>
-            <a:srgbClr val="FEF2F2"/>
-          </a:solidFill>
-          <a:ln w="19050">
-            <a:solidFill>
-              <a:srgbClr val="991B1B"/>
-            </a:solidFill>
-          </a:ln>
-          <a:effectLst/>
-        </p:spPr>
-        <p:style>
-          <a:lnRef idx="1">
-            <a:schemeClr val="accent1"/>
-          </a:lnRef>
-          <a:fillRef idx="3">
-            <a:schemeClr val="accent1"/>
-          </a:fillRef>
-          <a:effectRef idx="2">
-            <a:schemeClr val="accent1"/>
-          </a:effectRef>
-          <a:fontRef idx="minor">
-            <a:schemeClr val="lt1"/>
-          </a:fontRef>
-        </p:style>
-        <p:txBody>
-          <a:bodyPr rtlCol="0" anchor="ctr"/>
-          <a:lstStyle/>
-          <a:p>
-            <a:pPr algn="ctr"/>
-          </a:p>
-        </p:txBody>
-      </p:sp>
-      <p:sp>
-        <p:nvSpPr>
-          <p:cNvPr id="8" name="TextBox 7"/>
+              <a:t>Nhập họ tên và lớp</a:t>
+            </a:r>
+          </a:p>
+          <a:p>
+            <a:pPr algn="l" marL="365760" indent="-365760">
+              <a:spcAft>
+                <a:spcPts val="1000"/>
+              </a:spcAft>
+              <a:buClr>
+                <a:srgbClr val="1E40AF"/>
+              </a:buClr>
+              <a:buFont typeface="Arial"/>
+              <a:buChar char="•"/>
+            </a:pPr>
+            <a:r>
+              <a:rPr sz="2600">
+                <a:solidFill>
+                  <a:srgbClr val="1E293B"/>
+                </a:solidFill>
+                <a:latin typeface="Calibri"/>
+              </a:rPr>
+              <a:t>7 câu – làm trong 7 phút</a:t>
+            </a:r>
+          </a:p>
+          <a:p>
+            <a:pPr algn="l" marL="365760" indent="-365760">
+              <a:spcAft>
+                <a:spcPts val="1000"/>
+              </a:spcAft>
+              <a:buClr>
+                <a:srgbClr val="1E40AF"/>
+              </a:buClr>
+              <a:buFont typeface="Arial"/>
+              <a:buChar char="•"/>
+            </a:pPr>
+            <a:r>
+              <a:rPr sz="2600">
+                <a:solidFill>
+                  <a:srgbClr val="1E293B"/>
+                </a:solidFill>
+                <a:latin typeface="Calibri"/>
+              </a:rPr>
+              <a:t>Nộp bài, xem lời giải</a:t>
+            </a:r>
+          </a:p>
+        </p:txBody>
+      </p:sp>
+      <p:sp>
+        <p:nvSpPr>
+          <p:cNvPr id="9" name="TextBox 8"/>
           <p:cNvSpPr txBox="1"/>
           <p:nvPr/>
         </p:nvSpPr>
         <p:spPr>
           <a:xfrm>
-            <a:off x="914400" y="3346704"/>
-            <a:ext cx="8321040" cy="685800"/>
+            <a:off x="5760720" y="4754880"/>
+            <a:ext cx="6035040" cy="1188720"/>
           </a:xfrm>
           <a:prstGeom prst="rect">
             <a:avLst/>
@@ -7296,24 +7613,25 @@
           <a:noFill/>
         </p:spPr>
         <p:txBody>
-          <a:bodyPr wrap="square" anchor="ctr">
+          <a:bodyPr wrap="square" anchor="t">
             <a:spAutoFit/>
           </a:bodyPr>
           <a:lstStyle/>
           <a:p>
             <a:pPr algn="l">
               <a:spcAft>
-                <a:spcPts val="400"/>
+                <a:spcPts val="1000"/>
               </a:spcAft>
             </a:pPr>
             <a:r>
-              <a:rPr sz="2400" b="1">
-                <a:solidFill>
-                  <a:srgbClr val="991B1B"/>
+              <a:rPr sz="1800" b="1">
+                <a:solidFill>
+                  <a:srgbClr val="1E40AF"/>
                 </a:solidFill>
                 <a:latin typeface="Calibri"/>
+                <a:hlinkClick r:id="rId3"/>
               </a:rPr>
-              <a:t>AI không xét đủ các đỉnh</a:t>
+              <a:t>trangtu66.github.io/Taode_thi_online/cc_bai4_t10.html</a:t>
             </a:r>
           </a:p>
         </p:txBody>
